--- a/docs/KronOS_PresentacionEjecutiva_2026.pptx
+++ b/docs/KronOS_PresentacionEjecutiva_2026.pptx
@@ -4,6 +4,9 @@
   <p:sldMasterIdLst>
     <p:sldMasterId id="2147483648" r:id="rId1"/>
   </p:sldMasterIdLst>
+  <p:notesMasterIdLst>
+    <p:notesMasterId r:id="rId14"/>
+  </p:notesMasterIdLst>
   <p:sldIdLst>
     <p:sldId id="256" r:id="rId2"/>
     <p:sldId id="257" r:id="rId3"/>
@@ -18,10 +21,7 @@
     <p:sldId id="266" r:id="rId12"/>
     <p:sldId id="267" r:id="rId13"/>
   </p:sldIdLst>
-  <p:notesMasterIdLst>
-    <p:notesMasterId r:id="rId14"/>
-  </p:notesMasterIdLst>
-  <p:sldSz cx="9144000" cy="5143500"/>
+  <p:sldSz cx="9144000" cy="5143500" type="screen16x9"/>
   <p:notesSz cx="5143500" cy="9144000"/>
   <p:defaultTextStyle>
     <a:lvl1pPr marL="0" algn="l" defTabSz="914400" rtl="0" eaLnBrk="1" latinLnBrk="0" hangingPunct="1">
@@ -115,13 +115,20 @@
       </a:defRPr>
     </a:lvl9pPr>
   </p:defaultTextStyle>
+  <p:extLst>
+    <p:ext uri="{EFAFB233-063F-42B5-8137-9DF3F51BA10A}">
+      <p15:sldGuideLst xmlns:p15="http://schemas.microsoft.com/office/powerpoint/2012/main"/>
+    </p:ext>
+  </p:extLst>
 </p:presentation>
 </file>
 
 <file path=ppt/charts/chart1.xml><?xml version="1.0" encoding="utf-8"?>
-<c:chartSpace xmlns:c="http://schemas.openxmlformats.org/drawingml/2006/chart" xmlns:a="http://schemas.openxmlformats.org/drawingml/2006/main" xmlns:r="http://schemas.openxmlformats.org/officeDocument/2006/relationships">
+<c:chartSpace xmlns:c="http://schemas.openxmlformats.org/drawingml/2006/chart" xmlns:a="http://schemas.openxmlformats.org/drawingml/2006/main" xmlns:r="http://schemas.openxmlformats.org/officeDocument/2006/relationships" xmlns:c16r2="http://schemas.microsoft.com/office/drawing/2015/06/chart">
   <c:date1904 val="0"/>
+  <c:lang val="es-MX"/>
   <c:roundedCorners val="1"/>
+  <c:style val="2"/>
   <c:chart>
     <c:title>
       <c:tx>
@@ -138,7 +145,7 @@
               </a:defRPr>
             </a:pPr>
             <a:r>
-              <a:rPr sz="1200" b="0" i="0" u="none" strike="noStrike">
+              <a:rPr lang="es-MX" sz="1200" b="0" i="0" u="none" strike="noStrike">
                 <a:solidFill>
                   <a:srgbClr val="1B2A4A"/>
                 </a:solidFill>
@@ -149,7 +156,6 @@
           </a:p>
         </c:rich>
       </c:tx>
-      <c:layout/>
       <c:overlay val="0"/>
     </c:title>
     <c:autoTitleDeleted val="0"/>
@@ -180,40 +186,15 @@
             <a:effectLst/>
           </c:spPr>
           <c:invertIfNegative val="0"/>
-          <c:dLbls>
-            <c:numFmt formatCode="#,##0" sourceLinked="0"/>
-            <c:txPr>
-              <a:bodyPr/>
-              <a:lstStyle/>
-              <a:p>
-                <a:pPr>
-                  <a:defRPr b="0" i="0" strike="noStrike" sz="1200" u="none">
-                    <a:solidFill>
-                      <a:srgbClr val="000000"/>
-                    </a:solidFill>
-                    <a:latin typeface="Arial"/>
-                  </a:defRPr>
-                </a:pPr>
-              </a:p>
-            </c:txPr>
-            <c:showLegendKey val="0"/>
-            <c:showVal val="1"/>
-            <c:showCatName val="0"/>
-            <c:showSerName val="0"/>
-            <c:showPercent val="0"/>
-            <c:showBubbleSize val="0"/>
-            <c:showLeaderLines val="0"/>
-          </c:dLbls>
           <c:dPt>
             <c:idx val="0"/>
             <c:invertIfNegative val="0"/>
             <c:bubble3D val="0"/>
-            <c:spPr>
-              <a:solidFill>
-                <a:srgbClr val="DC2626"/>
-              </a:solidFill>
-              <a:effectLst/>
-            </c:spPr>
+            <c:extLst>
+              <c:ext xmlns:c16="http://schemas.microsoft.com/office/drawing/2014/chart" uri="{C3380CC4-5D6E-409C-BE32-E72D297353CC}">
+                <c16:uniqueId val="{00000001-41E5-46EF-A361-323357AA0FD0}"/>
+              </c:ext>
+            </c:extLst>
           </c:dPt>
           <c:dPt>
             <c:idx val="1"/>
@@ -225,17 +206,21 @@
               </a:solidFill>
               <a:effectLst/>
             </c:spPr>
+            <c:extLst>
+              <c:ext xmlns:c16="http://schemas.microsoft.com/office/drawing/2014/chart" uri="{C3380CC4-5D6E-409C-BE32-E72D297353CC}">
+                <c16:uniqueId val="{00000003-41E5-46EF-A361-323357AA0FD0}"/>
+              </c:ext>
+            </c:extLst>
           </c:dPt>
           <c:dPt>
             <c:idx val="2"/>
             <c:invertIfNegative val="0"/>
             <c:bubble3D val="0"/>
-            <c:spPr>
-              <a:solidFill>
-                <a:srgbClr val="DC2626"/>
-              </a:solidFill>
-              <a:effectLst/>
-            </c:spPr>
+            <c:extLst>
+              <c:ext xmlns:c16="http://schemas.microsoft.com/office/drawing/2014/chart" uri="{C3380CC4-5D6E-409C-BE32-E72D297353CC}">
+                <c16:uniqueId val="{00000005-41E5-46EF-A361-323357AA0FD0}"/>
+              </c:ext>
+            </c:extLst>
           </c:dPt>
           <c:dPt>
             <c:idx val="3"/>
@@ -247,32 +232,72 @@
               </a:solidFill>
               <a:effectLst/>
             </c:spPr>
+            <c:extLst>
+              <c:ext xmlns:c16="http://schemas.microsoft.com/office/drawing/2014/chart" uri="{C3380CC4-5D6E-409C-BE32-E72D297353CC}">
+                <c16:uniqueId val="{00000007-41E5-46EF-A361-323357AA0FD0}"/>
+              </c:ext>
+            </c:extLst>
           </c:dPt>
+          <c:dLbls>
+            <c:numFmt formatCode="#,##0" sourceLinked="0"/>
+            <c:spPr>
+              <a:noFill/>
+              <a:ln>
+                <a:noFill/>
+              </a:ln>
+              <a:effectLst/>
+            </c:spPr>
+            <c:txPr>
+              <a:bodyPr/>
+              <a:lstStyle/>
+              <a:p>
+                <a:pPr>
+                  <a:defRPr sz="1200" b="0" i="0" u="none" strike="noStrike">
+                    <a:solidFill>
+                      <a:srgbClr val="000000"/>
+                    </a:solidFill>
+                    <a:latin typeface="Arial"/>
+                  </a:defRPr>
+                </a:pPr>
+                <a:endParaRPr lang="es-MX"/>
+              </a:p>
+            </c:txPr>
+            <c:showLegendKey val="0"/>
+            <c:showVal val="1"/>
+            <c:showCatName val="0"/>
+            <c:showSerName val="0"/>
+            <c:showPercent val="0"/>
+            <c:showBubbleSize val="0"/>
+            <c:showLeaderLines val="0"/>
+            <c:extLst>
+              <c:ext xmlns:c15="http://schemas.microsoft.com/office/drawing/2012/chart" uri="{CE6537A1-D6FC-4f65-9D91-7224C49458BB}">
+                <c15:showLeaderLines val="0"/>
+              </c:ext>
+            </c:extLst>
+          </c:dLbls>
           <c:cat>
-            <c:multiLvlStrRef>
+            <c:strRef>
               <c:f>Sheet1!$A$2:$A$5</c:f>
-              <c:multiLvlStrCache>
+              <c:strCache>
                 <c:ptCount val="4"/>
-                <c:lvl>
-                  <c:pt idx="0">
-                    <c:v>Registro
+                <c:pt idx="0">
+                  <c:v>Registro
 empleados (×10)</c:v>
-                  </c:pt>
-                  <c:pt idx="1">
-                    <c:v>Tickets
+                </c:pt>
+                <c:pt idx="1">
+                  <c:v>Tickets
 soporte</c:v>
-                  </c:pt>
-                  <c:pt idx="2">
-                    <c:v>Coordinación
+                </c:pt>
+                <c:pt idx="2">
+                  <c:v>Coordinación
 médicos</c:v>
-                  </c:pt>
-                  <c:pt idx="3">
-                    <c:v>Reinstalaciones
+                </c:pt>
+                <c:pt idx="3">
+                  <c:v>Reinstalaciones
 app</c:v>
-                  </c:pt>
-                </c:lvl>
-              </c:multiLvlStrCache>
-            </c:multiLvlStrRef>
+                </c:pt>
+              </c:strCache>
+            </c:strRef>
           </c:cat>
           <c:val>
             <c:numRef>
@@ -295,36 +320,23 @@
               </c:numCache>
             </c:numRef>
           </c:val>
+          <c:extLst>
+            <c:ext xmlns:c16="http://schemas.microsoft.com/office/drawing/2014/chart" uri="{C3380CC4-5D6E-409C-BE32-E72D297353CC}">
+              <c16:uniqueId val="{00000008-41E5-46EF-A361-323357AA0FD0}"/>
+            </c:ext>
+          </c:extLst>
         </c:ser>
         <c:dLbls>
-          <c:numFmt formatCode="#,##0" sourceLinked="0"/>
-          <c:txPr>
-            <a:bodyPr/>
-            <a:lstStyle/>
-            <a:p>
-              <a:pPr>
-                <a:defRPr b="0" i="0" strike="noStrike" sz="1200" u="none">
-                  <a:solidFill>
-                    <a:srgbClr val="000000"/>
-                  </a:solidFill>
-                  <a:latin typeface="Arial"/>
-                </a:defRPr>
-              </a:pPr>
-            </a:p>
-          </c:txPr>
           <c:showLegendKey val="0"/>
           <c:showVal val="1"/>
           <c:showCatName val="0"/>
           <c:showSerName val="0"/>
           <c:showPercent val="0"/>
           <c:showBubbleSize val="0"/>
-          <c:showLeaderLines val="0"/>
         </c:dLbls>
         <c:gapWidth val="150"/>
-        <c:overlap val="0"/>
         <c:axId val="2094734554"/>
         <c:axId val="2094734552"/>
-        <c:axId val="2094734556"/>
       </c:barChart>
       <c:catAx>
         <c:axId val="2094734554"/>
@@ -365,6 +377,7 @@
         <c:crosses val="autoZero"/>
         <c:auto val="1"/>
         <c:lblAlgn val="ctr"/>
+        <c:lblOffset val="100"/>
         <c:noMultiLvlLbl val="1"/>
       </c:catAx>
       <c:valAx>
@@ -427,6 +440,7 @@
     </c:plotArea>
     <c:plotVisOnly val="1"/>
     <c:dispBlanksAs val="span"/>
+    <c:showDLblsOverMax val="1"/>
   </c:chart>
   <c:spPr>
     <a:solidFill>
@@ -444,9 +458,11 @@
 </file>
 
 <file path=ppt/charts/chart2.xml><?xml version="1.0" encoding="utf-8"?>
-<c:chartSpace xmlns:c="http://schemas.openxmlformats.org/drawingml/2006/chart" xmlns:a="http://schemas.openxmlformats.org/drawingml/2006/main" xmlns:r="http://schemas.openxmlformats.org/officeDocument/2006/relationships">
+<c:chartSpace xmlns:c="http://schemas.openxmlformats.org/drawingml/2006/chart" xmlns:a="http://schemas.openxmlformats.org/drawingml/2006/main" xmlns:r="http://schemas.openxmlformats.org/officeDocument/2006/relationships" xmlns:c16r2="http://schemas.microsoft.com/office/drawing/2015/06/chart">
   <c:date1904 val="0"/>
+  <c:lang val="es-MX"/>
   <c:roundedCorners val="1"/>
+  <c:style val="2"/>
   <c:chart>
     <c:title>
       <c:tx>
@@ -463,7 +479,7 @@
               </a:defRPr>
             </a:pPr>
             <a:r>
-              <a:rPr sz="1200" b="0" i="0" u="none" strike="noStrike">
+              <a:rPr lang="es-MX" sz="1200" b="0" i="0" u="none" strike="noStrike">
                 <a:solidFill>
                   <a:srgbClr val="1B2A4A"/>
                 </a:solidFill>
@@ -474,7 +490,6 @@
           </a:p>
         </c:rich>
       </c:tx>
-      <c:layout/>
       <c:overlay val="0"/>
     </c:title>
     <c:autoTitleDeleted val="0"/>
@@ -505,40 +520,15 @@
             <a:effectLst/>
           </c:spPr>
           <c:invertIfNegative val="0"/>
-          <c:dLbls>
-            <c:numFmt formatCode="#,##0" sourceLinked="0"/>
-            <c:txPr>
-              <a:bodyPr/>
-              <a:lstStyle/>
-              <a:p>
-                <a:pPr>
-                  <a:defRPr b="0" i="0" strike="noStrike" sz="1100" u="none">
-                    <a:solidFill>
-                      <a:srgbClr val="1E293B"/>
-                    </a:solidFill>
-                    <a:latin typeface="Arial"/>
-                  </a:defRPr>
-                </a:pPr>
-              </a:p>
-            </c:txPr>
-            <c:showLegendKey val="0"/>
-            <c:showVal val="1"/>
-            <c:showCatName val="0"/>
-            <c:showSerName val="0"/>
-            <c:showPercent val="0"/>
-            <c:showBubbleSize val="0"/>
-            <c:showLeaderLines val="0"/>
-          </c:dLbls>
           <c:dPt>
             <c:idx val="0"/>
             <c:invertIfNegative val="0"/>
             <c:bubble3D val="0"/>
-            <c:spPr>
-              <a:solidFill>
-                <a:srgbClr val="DC2626"/>
-              </a:solidFill>
-              <a:effectLst/>
-            </c:spPr>
+            <c:extLst>
+              <c:ext xmlns:c16="http://schemas.microsoft.com/office/drawing/2014/chart" uri="{C3380CC4-5D6E-409C-BE32-E72D297353CC}">
+                <c16:uniqueId val="{00000001-335B-4402-9D6D-817E720BF645}"/>
+              </c:ext>
+            </c:extLst>
           </c:dPt>
           <c:dPt>
             <c:idx val="1"/>
@@ -550,22 +540,62 @@
               </a:solidFill>
               <a:effectLst/>
             </c:spPr>
+            <c:extLst>
+              <c:ext xmlns:c16="http://schemas.microsoft.com/office/drawing/2014/chart" uri="{C3380CC4-5D6E-409C-BE32-E72D297353CC}">
+                <c16:uniqueId val="{00000003-335B-4402-9D6D-817E720BF645}"/>
+              </c:ext>
+            </c:extLst>
           </c:dPt>
+          <c:dLbls>
+            <c:numFmt formatCode="#,##0" sourceLinked="0"/>
+            <c:spPr>
+              <a:noFill/>
+              <a:ln>
+                <a:noFill/>
+              </a:ln>
+              <a:effectLst/>
+            </c:spPr>
+            <c:txPr>
+              <a:bodyPr/>
+              <a:lstStyle/>
+              <a:p>
+                <a:pPr>
+                  <a:defRPr sz="1100" b="0" i="0" u="none" strike="noStrike">
+                    <a:solidFill>
+                      <a:srgbClr val="1E293B"/>
+                    </a:solidFill>
+                    <a:latin typeface="Arial"/>
+                  </a:defRPr>
+                </a:pPr>
+                <a:endParaRPr lang="es-MX"/>
+              </a:p>
+            </c:txPr>
+            <c:showLegendKey val="0"/>
+            <c:showVal val="1"/>
+            <c:showCatName val="0"/>
+            <c:showSerName val="0"/>
+            <c:showPercent val="0"/>
+            <c:showBubbleSize val="0"/>
+            <c:showLeaderLines val="0"/>
+            <c:extLst>
+              <c:ext xmlns:c15="http://schemas.microsoft.com/office/drawing/2012/chart" uri="{CE6537A1-D6FC-4f65-9D91-7224C49458BB}">
+                <c15:showLeaderLines val="0"/>
+              </c:ext>
+            </c:extLst>
+          </c:dLbls>
           <c:cat>
-            <c:multiLvlStrRef>
+            <c:strRef>
               <c:f>Sheet1!$A$2:$A$3</c:f>
-              <c:multiLvlStrCache>
+              <c:strCache>
                 <c:ptCount val="2"/>
-                <c:lvl>
-                  <c:pt idx="0">
-                    <c:v>RUNAHR (~)</c:v>
-                  </c:pt>
-                  <c:pt idx="1">
-                    <c:v>KronOS AWS</c:v>
-                  </c:pt>
-                </c:lvl>
-              </c:multiLvlStrCache>
-            </c:multiLvlStrRef>
+                <c:pt idx="0">
+                  <c:v>RUNAHR (~)</c:v>
+                </c:pt>
+                <c:pt idx="1">
+                  <c:v>KronOS AWS</c:v>
+                </c:pt>
+              </c:strCache>
+            </c:strRef>
           </c:cat>
           <c:val>
             <c:numRef>
@@ -582,36 +612,23 @@
               </c:numCache>
             </c:numRef>
           </c:val>
+          <c:extLst>
+            <c:ext xmlns:c16="http://schemas.microsoft.com/office/drawing/2014/chart" uri="{C3380CC4-5D6E-409C-BE32-E72D297353CC}">
+              <c16:uniqueId val="{00000004-335B-4402-9D6D-817E720BF645}"/>
+            </c:ext>
+          </c:extLst>
         </c:ser>
         <c:dLbls>
-          <c:numFmt formatCode="#,##0" sourceLinked="0"/>
-          <c:txPr>
-            <a:bodyPr/>
-            <a:lstStyle/>
-            <a:p>
-              <a:pPr>
-                <a:defRPr b="0" i="0" strike="noStrike" sz="1100" u="none">
-                  <a:solidFill>
-                    <a:srgbClr val="1E293B"/>
-                  </a:solidFill>
-                  <a:latin typeface="Arial"/>
-                </a:defRPr>
-              </a:pPr>
-            </a:p>
-          </c:txPr>
           <c:showLegendKey val="0"/>
           <c:showVal val="1"/>
           <c:showCatName val="0"/>
           <c:showSerName val="0"/>
           <c:showPercent val="0"/>
           <c:showBubbleSize val="0"/>
-          <c:showLeaderLines val="0"/>
         </c:dLbls>
         <c:gapWidth val="150"/>
-        <c:overlap val="0"/>
         <c:axId val="2094734554"/>
         <c:axId val="2094734552"/>
-        <c:axId val="2094734556"/>
       </c:barChart>
       <c:catAx>
         <c:axId val="2094734554"/>
@@ -652,6 +669,7 @@
         <c:crosses val="autoZero"/>
         <c:auto val="1"/>
         <c:lblAlgn val="ctr"/>
+        <c:lblOffset val="100"/>
         <c:noMultiLvlLbl val="1"/>
       </c:catAx>
       <c:valAx>
@@ -714,6 +732,7 @@
     </c:plotArea>
     <c:plotVisOnly val="1"/>
     <c:dispBlanksAs val="span"/>
+    <c:showDLblsOverMax val="1"/>
   </c:chart>
   <c:spPr>
     <a:solidFill>
@@ -752,234 +771,10 @@
           <a:chExt cx="0" cy="0"/>
         </a:xfrm>
       </p:grpSpPr>
-      <p:sp>
-        <p:nvSpPr>
-          <p:cNvPr id="2" name="Header Placeholder 1"/>
-          <p:cNvSpPr>
-            <a:spLocks noGrp="1"/>
-          </p:cNvSpPr>
-          <p:nvPr>
-            <p:ph type="hdr" sz="quarter"/>
-          </p:nvPr>
-        </p:nvSpPr>
-        <p:spPr>
-          <a:xfrm>
-            <a:off x="0" y="0"/>
-            <a:ext cx="2971800" cy="458788"/>
-          </a:xfrm>
-          <a:prstGeom prst="rect">
-            <a:avLst/>
-          </a:prstGeom>
-        </p:spPr>
-        <p:txBody>
-          <a:bodyPr vert="horz" lIns="91440" tIns="45720" rIns="91440" bIns="45720" rtlCol="0"/>
-          <a:lstStyle>
-            <a:lvl1pPr algn="l">
-              <a:defRPr sz="1200"/>
-            </a:lvl1pPr>
-          </a:lstStyle>
-          <a:p>
-            <a:endParaRPr lang="en-US"/>
-          </a:p>
-        </p:txBody>
-      </p:sp>
-      <p:sp>
-        <p:nvSpPr>
-          <p:cNvPr id="3" name="Date Placeholder 2"/>
-          <p:cNvSpPr>
-            <a:spLocks noGrp="1"/>
-          </p:cNvSpPr>
-          <p:nvPr>
-            <p:ph type="dt" idx="1"/>
-          </p:nvPr>
-        </p:nvSpPr>
-        <p:spPr>
-          <a:xfrm>
-            <a:off x="3884613" y="0"/>
-            <a:ext cx="2971800" cy="458788"/>
-          </a:xfrm>
-          <a:prstGeom prst="rect">
-            <a:avLst/>
-          </a:prstGeom>
-        </p:spPr>
-        <p:txBody>
-          <a:bodyPr vert="horz" lIns="91440" tIns="45720" rIns="91440" bIns="45720" rtlCol="0"/>
-          <a:lstStyle>
-            <a:lvl1pPr algn="r">
-              <a:defRPr sz="1200"/>
-            </a:lvl1pPr>
-          </a:lstStyle>
-          <a:p>
-            <a:fld id="{5282F153-3F37-0F45-9E97-73ACFA13230C}" type="datetimeFigureOut">
-              <a:rPr lang="en-US"/>
-              <a:t>7/23/19</a:t>
-            </a:fld>
-            <a:endParaRPr lang="en-US"/>
-          </a:p>
-        </p:txBody>
-      </p:sp>
-      <p:sp>
-        <p:nvSpPr>
-          <p:cNvPr id="4" name="Slide Image Placeholder 3"/>
-          <p:cNvSpPr>
-            <a:spLocks noGrp="1" noRot="1" noChangeAspect="1"/>
-          </p:cNvSpPr>
-          <p:nvPr>
-            <p:ph type="sldImg" idx="2"/>
-          </p:nvPr>
-        </p:nvSpPr>
-        <p:spPr>
-          <a:xfrm>
-            <a:off x="685800" y="1143000"/>
-            <a:ext cx="5486400" cy="3086100"/>
-          </a:xfrm>
-          <a:prstGeom prst="rect">
-            <a:avLst/>
-          </a:prstGeom>
-          <a:noFill/>
-          <a:ln w="12700">
-            <a:solidFill>
-              <a:prstClr val="black"/>
-            </a:solidFill>
-          </a:ln>
-        </p:spPr>
-        <p:txBody>
-          <a:bodyPr vert="horz" lIns="91440" tIns="45720" rIns="91440" bIns="45720" rtlCol="0" anchor="ctr"/>
-          <a:lstStyle/>
-          <a:p>
-            <a:endParaRPr lang="en-US"/>
-          </a:p>
-        </p:txBody>
-      </p:sp>
-      <p:sp>
-        <p:nvSpPr>
-          <p:cNvPr id="5" name="Notes Placeholder 4"/>
-          <p:cNvSpPr>
-            <a:spLocks noGrp="1"/>
-          </p:cNvSpPr>
-          <p:nvPr>
-            <p:ph type="body" sz="quarter" idx="3"/>
-          </p:nvPr>
-        </p:nvSpPr>
-        <p:spPr>
-          <a:xfrm>
-            <a:off x="685800" y="4400550"/>
-            <a:ext cx="5486400" cy="3600450"/>
-          </a:xfrm>
-          <a:prstGeom prst="rect">
-            <a:avLst/>
-          </a:prstGeom>
-        </p:spPr>
-        <p:txBody>
-          <a:bodyPr vert="horz" lIns="91440" tIns="45720" rIns="91440" bIns="45720" rtlCol="0"/>
-          <a:lstStyle/>
-          <a:p>
-            <a:pPr lvl="0"/>
-            <a:r>
-              <a:rPr lang="en-US"/>
-              <a:t>Click to edit Master text styles</a:t>
-            </a:r>
-          </a:p>
-          <a:p>
-            <a:pPr lvl="1"/>
-            <a:r>
-              <a:rPr lang="en-US"/>
-              <a:t>Second level</a:t>
-            </a:r>
-          </a:p>
-          <a:p>
-            <a:pPr lvl="2"/>
-            <a:r>
-              <a:rPr lang="en-US"/>
-              <a:t>Third level</a:t>
-            </a:r>
-          </a:p>
-          <a:p>
-            <a:pPr lvl="3"/>
-            <a:r>
-              <a:rPr lang="en-US"/>
-              <a:t>Fourth level</a:t>
-            </a:r>
-          </a:p>
-          <a:p>
-            <a:pPr lvl="4"/>
-            <a:r>
-              <a:rPr lang="en-US"/>
-              <a:t>Fifth level</a:t>
-            </a:r>
-          </a:p>
-        </p:txBody>
-      </p:sp>
-      <p:sp>
-        <p:nvSpPr>
-          <p:cNvPr id="6" name="Footer Placeholder 5"/>
-          <p:cNvSpPr>
-            <a:spLocks noGrp="1"/>
-          </p:cNvSpPr>
-          <p:nvPr>
-            <p:ph type="ftr" sz="quarter" idx="4"/>
-          </p:nvPr>
-        </p:nvSpPr>
-        <p:spPr>
-          <a:xfrm>
-            <a:off x="0" y="8685213"/>
-            <a:ext cx="2971800" cy="458787"/>
-          </a:xfrm>
-          <a:prstGeom prst="rect">
-            <a:avLst/>
-          </a:prstGeom>
-        </p:spPr>
-        <p:txBody>
-          <a:bodyPr vert="horz" lIns="91440" tIns="45720" rIns="91440" bIns="45720" rtlCol="0" anchor="b"/>
-          <a:lstStyle>
-            <a:lvl1pPr algn="l">
-              <a:defRPr sz="1200"/>
-            </a:lvl1pPr>
-          </a:lstStyle>
-          <a:p>
-            <a:endParaRPr lang="en-US"/>
-          </a:p>
-        </p:txBody>
-      </p:sp>
-      <p:sp>
-        <p:nvSpPr>
-          <p:cNvPr id="7" name="Slide Number Placeholder 6"/>
-          <p:cNvSpPr>
-            <a:spLocks noGrp="1"/>
-          </p:cNvSpPr>
-          <p:nvPr>
-            <p:ph type="sldNum" sz="quarter" idx="5"/>
-          </p:nvPr>
-        </p:nvSpPr>
-        <p:spPr>
-          <a:xfrm>
-            <a:off x="3884613" y="8685213"/>
-            <a:ext cx="2971800" cy="458787"/>
-          </a:xfrm>
-          <a:prstGeom prst="rect">
-            <a:avLst/>
-          </a:prstGeom>
-        </p:spPr>
-        <p:txBody>
-          <a:bodyPr vert="horz" lIns="91440" tIns="45720" rIns="91440" bIns="45720" rtlCol="0" anchor="b"/>
-          <a:lstStyle>
-            <a:lvl1pPr algn="r">
-              <a:defRPr sz="1200"/>
-            </a:lvl1pPr>
-          </a:lstStyle>
-          <a:p>
-            <a:fld id="{CE5E9CC1-C706-0F49-92D6-E571CC5EEA8F}" type="slidenum">
-              <a:rPr lang="en-US"/>
-              <a:t>‹#›</a:t>
-            </a:fld>
-            <a:endParaRPr lang="en-US"/>
-          </a:p>
-        </p:txBody>
-      </p:sp>
     </p:spTree>
     <p:extLst>
       <p:ext uri="{BB962C8B-B14F-4D97-AF65-F5344CB8AC3E}">
-        <p14:creationId xmlns:p14="http://schemas.microsoft.com/office/powerpoint/2010/main" val="1024086991"/>
+        <p14:creationId xmlns:p14="http://schemas.microsoft.com/office/powerpoint/2010/main" val="1524445139"/>
       </p:ext>
     </p:extLst>
   </p:cSld>
@@ -1123,10 +918,6 @@
           <a:bodyPr/>
           <a:lstStyle/>
           <a:p>
-            <a:r>
-              <a:rPr lang="en-US" dirty="0"/>
-              <a:t/>
-            </a:r>
             <a:endParaRPr lang="en-US" dirty="0"/>
           </a:p>
         </p:txBody>
@@ -1211,10 +1002,6 @@
           <a:bodyPr/>
           <a:lstStyle/>
           <a:p>
-            <a:r>
-              <a:rPr lang="en-US" dirty="0"/>
-              <a:t/>
-            </a:r>
             <a:endParaRPr lang="en-US" dirty="0"/>
           </a:p>
         </p:txBody>
@@ -1299,10 +1086,6 @@
           <a:bodyPr/>
           <a:lstStyle/>
           <a:p>
-            <a:r>
-              <a:rPr lang="en-US" dirty="0"/>
-              <a:t/>
-            </a:r>
             <a:endParaRPr lang="en-US" dirty="0"/>
           </a:p>
         </p:txBody>
@@ -1387,10 +1170,6 @@
           <a:bodyPr/>
           <a:lstStyle/>
           <a:p>
-            <a:r>
-              <a:rPr lang="en-US" dirty="0"/>
-              <a:t/>
-            </a:r>
             <a:endParaRPr lang="en-US" dirty="0"/>
           </a:p>
         </p:txBody>
@@ -1475,10 +1254,6 @@
           <a:bodyPr/>
           <a:lstStyle/>
           <a:p>
-            <a:r>
-              <a:rPr lang="en-US" dirty="0"/>
-              <a:t/>
-            </a:r>
             <a:endParaRPr lang="en-US" dirty="0"/>
           </a:p>
         </p:txBody>
@@ -1563,10 +1338,6 @@
           <a:bodyPr/>
           <a:lstStyle/>
           <a:p>
-            <a:r>
-              <a:rPr lang="en-US" dirty="0"/>
-              <a:t/>
-            </a:r>
             <a:endParaRPr lang="en-US" dirty="0"/>
           </a:p>
         </p:txBody>
@@ -1651,10 +1422,6 @@
           <a:bodyPr/>
           <a:lstStyle/>
           <a:p>
-            <a:r>
-              <a:rPr lang="en-US" dirty="0"/>
-              <a:t/>
-            </a:r>
             <a:endParaRPr lang="en-US" dirty="0"/>
           </a:p>
         </p:txBody>
@@ -1739,10 +1506,6 @@
           <a:bodyPr/>
           <a:lstStyle/>
           <a:p>
-            <a:r>
-              <a:rPr lang="en-US" dirty="0"/>
-              <a:t/>
-            </a:r>
             <a:endParaRPr lang="en-US" dirty="0"/>
           </a:p>
         </p:txBody>
@@ -1827,10 +1590,6 @@
           <a:bodyPr/>
           <a:lstStyle/>
           <a:p>
-            <a:r>
-              <a:rPr lang="en-US" dirty="0"/>
-              <a:t/>
-            </a:r>
             <a:endParaRPr lang="en-US" dirty="0"/>
           </a:p>
         </p:txBody>
@@ -1915,10 +1674,6 @@
           <a:bodyPr/>
           <a:lstStyle/>
           <a:p>
-            <a:r>
-              <a:rPr lang="en-US" dirty="0"/>
-              <a:t/>
-            </a:r>
             <a:endParaRPr lang="en-US" dirty="0"/>
           </a:p>
         </p:txBody>
@@ -2003,10 +1758,6 @@
           <a:bodyPr/>
           <a:lstStyle/>
           <a:p>
-            <a:r>
-              <a:rPr lang="en-US" dirty="0"/>
-              <a:t/>
-            </a:r>
             <a:endParaRPr lang="en-US" dirty="0"/>
           </a:p>
         </p:txBody>
@@ -2091,10 +1842,6 @@
           <a:bodyPr/>
           <a:lstStyle/>
           <a:p>
-            <a:r>
-              <a:rPr lang="en-US" dirty="0"/>
-              <a:t/>
-            </a:r>
             <a:endParaRPr lang="en-US" dirty="0"/>
           </a:p>
         </p:txBody>
@@ -2168,6 +1915,11 @@
 <file path=ppt/slideMasters/slideMaster1.xml><?xml version="1.0" encoding="utf-8"?>
 <p:sldMaster xmlns:a="http://schemas.openxmlformats.org/drawingml/2006/main" xmlns:r="http://schemas.openxmlformats.org/officeDocument/2006/relationships" xmlns:p="http://schemas.openxmlformats.org/presentationml/2006/main">
   <p:cSld>
+    <p:bg>
+      <p:bgRef idx="1001">
+        <a:schemeClr val="bg1"/>
+      </p:bgRef>
+    </p:bg>
     <p:spTree>
       <p:nvGrpSpPr>
         <p:cNvPr id="1" name=""/>
@@ -2450,6 +2202,7 @@
         <a:solidFill>
           <a:srgbClr val="1B2A4A"/>
         </a:solidFill>
+        <a:effectLst/>
       </p:bgPr>
     </p:bg>
     <p:spTree>
@@ -2485,6 +2238,13 @@
           </a:solidFill>
           <a:ln/>
         </p:spPr>
+        <p:txBody>
+          <a:bodyPr/>
+          <a:lstStyle/>
+          <a:p>
+            <a:endParaRPr lang="es-MX"/>
+          </a:p>
+        </p:txBody>
       </p:sp>
       <p:sp>
         <p:nvSpPr>
@@ -2507,6 +2267,13 @@
           </a:solidFill>
           <a:ln/>
         </p:spPr>
+        <p:txBody>
+          <a:bodyPr/>
+          <a:lstStyle/>
+          <a:p>
+            <a:endParaRPr lang="es-MX"/>
+          </a:p>
+        </p:txBody>
       </p:sp>
       <p:sp>
         <p:nvSpPr>
@@ -2529,6 +2296,13 @@
           </a:solidFill>
           <a:ln/>
         </p:spPr>
+        <p:txBody>
+          <a:bodyPr/>
+          <a:lstStyle/>
+          <a:p>
+            <a:endParaRPr lang="es-MX"/>
+          </a:p>
+        </p:txBody>
       </p:sp>
       <p:sp>
         <p:nvSpPr>
@@ -2551,11 +2325,11 @@
           <a:bodyPr wrap="square" rtlCol="0" anchor="ctr"/>
           <a:lstStyle/>
           <a:p>
-            <a:pPr indent="0" marL="0">
+            <a:pPr marL="0" indent="0">
               <a:buNone/>
             </a:pPr>
             <a:r>
-              <a:rPr lang="en-US" sz="1100" b="1" spc="300" kern="0" dirty="0">
+              <a:rPr lang="en-US" sz="1100" b="1" kern="0" spc="300" dirty="0">
                 <a:solidFill>
                   <a:srgbClr val="0D9488"/>
                 </a:solidFill>
@@ -2590,7 +2364,7 @@
           <a:bodyPr wrap="square" rtlCol="0" anchor="ctr"/>
           <a:lstStyle/>
           <a:p>
-            <a:pPr indent="0" marL="0">
+            <a:pPr marL="0" indent="0">
               <a:buNone/>
             </a:pPr>
             <a:r>
@@ -2629,7 +2403,7 @@
           <a:bodyPr wrap="square" rtlCol="0" anchor="ctr"/>
           <a:lstStyle/>
           <a:p>
-            <a:pPr indent="0" marL="0">
+            <a:pPr marL="0" indent="0">
               <a:buNone/>
             </a:pPr>
             <a:r>
@@ -2669,6 +2443,13 @@
             <a:prstDash val="solid"/>
           </a:ln>
         </p:spPr>
+        <p:txBody>
+          <a:bodyPr/>
+          <a:lstStyle/>
+          <a:p>
+            <a:endParaRPr lang="es-MX"/>
+          </a:p>
+        </p:txBody>
       </p:sp>
       <p:sp>
         <p:nvSpPr>
@@ -2691,7 +2472,7 @@
           <a:bodyPr wrap="square" rtlCol="0" anchor="ctr"/>
           <a:lstStyle/>
           <a:p>
-            <a:pPr indent="0" marL="0">
+            <a:pPr marL="0" indent="0">
               <a:buNone/>
             </a:pPr>
             <a:r>
@@ -2730,6 +2511,13 @@
           </a:solidFill>
           <a:ln/>
         </p:spPr>
+        <p:txBody>
+          <a:bodyPr/>
+          <a:lstStyle/>
+          <a:p>
+            <a:endParaRPr lang="es-MX"/>
+          </a:p>
+        </p:txBody>
       </p:sp>
       <p:sp>
         <p:nvSpPr>
@@ -2752,7 +2540,7 @@
           <a:bodyPr wrap="square" rtlCol="0" anchor="ctr"/>
           <a:lstStyle/>
           <a:p>
-            <a:pPr indent="0" marL="0">
+            <a:pPr marL="0" indent="0">
               <a:buNone/>
             </a:pPr>
             <a:r>
@@ -2786,6 +2574,7 @@
         <a:solidFill>
           <a:srgbClr val="F8FAFC"/>
         </a:solidFill>
+        <a:effectLst/>
       </p:bgPr>
     </p:bg>
     <p:spTree>
@@ -2821,6 +2610,13 @@
           </a:solidFill>
           <a:ln/>
         </p:spPr>
+        <p:txBody>
+          <a:bodyPr/>
+          <a:lstStyle/>
+          <a:p>
+            <a:endParaRPr lang="es-MX"/>
+          </a:p>
+        </p:txBody>
       </p:sp>
       <p:sp>
         <p:nvSpPr>
@@ -2843,7 +2639,7 @@
           <a:bodyPr wrap="square" rtlCol="0" anchor="ctr"/>
           <a:lstStyle/>
           <a:p>
-            <a:pPr indent="0" marL="0">
+            <a:pPr marL="0" indent="0">
               <a:buNone/>
             </a:pPr>
             <a:r>
@@ -2863,7 +2659,7 @@
       </p:sp>
       <p:graphicFrame>
         <p:nvGraphicFramePr>
-          <p:cNvPr id="4" name="Chart 0" descr=""/>
+          <p:cNvPr id="4" name="Chart 0"/>
           <p:cNvGraphicFramePr/>
           <p:nvPr/>
         </p:nvGraphicFramePr>
@@ -2871,9 +2667,9 @@
           <a:off x="457200" y="914400"/>
           <a:ext cx="5029200" cy="3474720"/>
         </p:xfrm>
-        <a:graphic xmlns:a="http://schemas.openxmlformats.org/drawingml/2006/main">
+        <a:graphic>
           <a:graphicData uri="http://schemas.openxmlformats.org/drawingml/2006/chart">
-            <c:chart xmlns:c="http://schemas.openxmlformats.org/drawingml/2006/chart" r:id="rId1"/>
+            <c:chart xmlns:c="http://schemas.openxmlformats.org/drawingml/2006/chart" xmlns:r="http://schemas.openxmlformats.org/officeDocument/2006/relationships" r:id="rId3"/>
           </a:graphicData>
         </a:graphic>
       </p:graphicFrame>
@@ -2898,7 +2694,7 @@
           <a:bodyPr wrap="square" rtlCol="0" anchor="ctr"/>
           <a:lstStyle/>
           <a:p>
-            <a:pPr indent="0" marL="0">
+            <a:pPr marL="0" indent="0">
               <a:buNone/>
             </a:pPr>
             <a:r>
@@ -2934,6 +2730,13 @@
           </a:solidFill>
           <a:ln/>
         </p:spPr>
+        <p:txBody>
+          <a:bodyPr/>
+          <a:lstStyle/>
+          <a:p>
+            <a:endParaRPr lang="es-MX"/>
+          </a:p>
+        </p:txBody>
       </p:sp>
       <p:sp>
         <p:nvSpPr>
@@ -2956,7 +2759,7 @@
           <a:bodyPr wrap="square" rtlCol="0" anchor="ctr"/>
           <a:lstStyle/>
           <a:p>
-            <a:pPr indent="0" marL="0">
+            <a:pPr marL="0" indent="0">
               <a:buNone/>
             </a:pPr>
             <a:r>
@@ -2992,7 +2795,7 @@
           <a:bodyPr wrap="square" rtlCol="0" anchor="ctr"/>
           <a:lstStyle/>
           <a:p>
-            <a:pPr indent="0" marL="0">
+            <a:pPr marL="0" indent="0">
               <a:buNone/>
             </a:pPr>
             <a:r>
@@ -3026,6 +2829,13 @@
           </a:solidFill>
           <a:ln/>
         </p:spPr>
+        <p:txBody>
+          <a:bodyPr/>
+          <a:lstStyle/>
+          <a:p>
+            <a:endParaRPr lang="es-MX"/>
+          </a:p>
+        </p:txBody>
       </p:sp>
       <p:sp>
         <p:nvSpPr>
@@ -3048,7 +2858,7 @@
           <a:bodyPr wrap="square" rtlCol="0" anchor="ctr"/>
           <a:lstStyle/>
           <a:p>
-            <a:pPr indent="0" marL="0">
+            <a:pPr marL="0" indent="0">
               <a:buNone/>
             </a:pPr>
             <a:r>
@@ -3084,7 +2894,7 @@
           <a:bodyPr wrap="square" rtlCol="0" anchor="ctr"/>
           <a:lstStyle/>
           <a:p>
-            <a:pPr indent="0" marL="0">
+            <a:pPr marL="0" indent="0">
               <a:buNone/>
             </a:pPr>
             <a:r>
@@ -3123,6 +2933,13 @@
             <a:prstDash val="solid"/>
           </a:ln>
         </p:spPr>
+        <p:txBody>
+          <a:bodyPr/>
+          <a:lstStyle/>
+          <a:p>
+            <a:endParaRPr lang="es-MX"/>
+          </a:p>
+        </p:txBody>
       </p:sp>
       <p:sp>
         <p:nvSpPr>
@@ -3145,7 +2962,7 @@
           <a:bodyPr wrap="square" rtlCol="0" anchor="ctr"/>
           <a:lstStyle/>
           <a:p>
-            <a:pPr indent="0" marL="0">
+            <a:pPr marL="0" indent="0">
               <a:buNone/>
             </a:pPr>
             <a:r>
@@ -3176,6 +2993,7 @@
         <a:solidFill>
           <a:srgbClr val="F8FAFC"/>
         </a:solidFill>
+        <a:effectLst/>
       </p:bgPr>
     </p:bg>
     <p:spTree>
@@ -3211,6 +3029,13 @@
           </a:solidFill>
           <a:ln/>
         </p:spPr>
+        <p:txBody>
+          <a:bodyPr/>
+          <a:lstStyle/>
+          <a:p>
+            <a:endParaRPr lang="es-MX"/>
+          </a:p>
+        </p:txBody>
       </p:sp>
       <p:sp>
         <p:nvSpPr>
@@ -3233,7 +3058,7 @@
           <a:bodyPr wrap="square" rtlCol="0" anchor="ctr"/>
           <a:lstStyle/>
           <a:p>
-            <a:pPr indent="0" marL="0">
+            <a:pPr marL="0" indent="0">
               <a:buNone/>
             </a:pPr>
             <a:r>
@@ -3272,7 +3097,7 @@
           <a:bodyPr wrap="square" rtlCol="0" anchor="ctr"/>
           <a:lstStyle/>
           <a:p>
-            <a:pPr indent="0" marL="0">
+            <a:pPr marL="0" indent="0">
               <a:buNone/>
             </a:pPr>
             <a:r>
@@ -3311,6 +3136,13 @@
           </a:solidFill>
           <a:ln/>
         </p:spPr>
+        <p:txBody>
+          <a:bodyPr/>
+          <a:lstStyle/>
+          <a:p>
+            <a:endParaRPr lang="es-MX"/>
+          </a:p>
+        </p:txBody>
       </p:sp>
       <p:sp>
         <p:nvSpPr>
@@ -3333,6 +3165,13 @@
           </a:solidFill>
           <a:ln/>
         </p:spPr>
+        <p:txBody>
+          <a:bodyPr/>
+          <a:lstStyle/>
+          <a:p>
+            <a:endParaRPr lang="es-MX"/>
+          </a:p>
+        </p:txBody>
       </p:sp>
       <p:sp>
         <p:nvSpPr>
@@ -3353,6 +3192,13 @@
           </a:solidFill>
           <a:ln/>
         </p:spPr>
+        <p:txBody>
+          <a:bodyPr/>
+          <a:lstStyle/>
+          <a:p>
+            <a:endParaRPr lang="es-MX"/>
+          </a:p>
+        </p:txBody>
       </p:sp>
       <p:sp>
         <p:nvSpPr>
@@ -3375,7 +3221,7 @@
           <a:bodyPr wrap="square" rtlCol="0" anchor="ctr"/>
           <a:lstStyle/>
           <a:p>
-            <a:pPr algn="ctr" indent="0" marL="0">
+            <a:pPr marL="0" indent="0" algn="ctr">
               <a:buNone/>
             </a:pPr>
             <a:r>
@@ -3411,7 +3257,7 @@
           <a:bodyPr wrap="square" rtlCol="0" anchor="ctr"/>
           <a:lstStyle/>
           <a:p>
-            <a:pPr indent="0" marL="0">
+            <a:pPr marL="0" indent="0">
               <a:buNone/>
             </a:pPr>
             <a:r>
@@ -3447,7 +3293,7 @@
           <a:bodyPr wrap="square" rtlCol="0" anchor="ctr"/>
           <a:lstStyle/>
           <a:p>
-            <a:pPr indent="0" marL="0">
+            <a:pPr marL="0" indent="0">
               <a:buNone/>
             </a:pPr>
             <a:r>
@@ -3481,6 +3327,13 @@
           </a:solidFill>
           <a:ln/>
         </p:spPr>
+        <p:txBody>
+          <a:bodyPr/>
+          <a:lstStyle/>
+          <a:p>
+            <a:endParaRPr lang="es-MX"/>
+          </a:p>
+        </p:txBody>
       </p:sp>
       <p:sp>
         <p:nvSpPr>
@@ -3503,7 +3356,7 @@
           <a:bodyPr wrap="square" rtlCol="0" anchor="ctr"/>
           <a:lstStyle/>
           <a:p>
-            <a:pPr algn="ctr" indent="0" marL="0">
+            <a:pPr marL="0" indent="0" algn="ctr">
               <a:buNone/>
             </a:pPr>
             <a:r>
@@ -3539,7 +3392,7 @@
           <a:bodyPr wrap="square" rtlCol="0" anchor="ctr"/>
           <a:lstStyle/>
           <a:p>
-            <a:pPr indent="0" marL="0">
+            <a:pPr marL="0" indent="0">
               <a:buNone/>
             </a:pPr>
             <a:r>
@@ -3575,7 +3428,7 @@
           <a:bodyPr wrap="square" rtlCol="0" anchor="ctr"/>
           <a:lstStyle/>
           <a:p>
-            <a:pPr indent="0" marL="0">
+            <a:pPr marL="0" indent="0">
               <a:buNone/>
             </a:pPr>
             <a:r>
@@ -3609,6 +3462,13 @@
           </a:solidFill>
           <a:ln/>
         </p:spPr>
+        <p:txBody>
+          <a:bodyPr/>
+          <a:lstStyle/>
+          <a:p>
+            <a:endParaRPr lang="es-MX"/>
+          </a:p>
+        </p:txBody>
       </p:sp>
       <p:sp>
         <p:nvSpPr>
@@ -3631,7 +3491,7 @@
           <a:bodyPr wrap="square" rtlCol="0" anchor="ctr"/>
           <a:lstStyle/>
           <a:p>
-            <a:pPr algn="ctr" indent="0" marL="0">
+            <a:pPr marL="0" indent="0" algn="ctr">
               <a:buNone/>
             </a:pPr>
             <a:r>
@@ -3667,7 +3527,7 @@
           <a:bodyPr wrap="square" rtlCol="0" anchor="ctr"/>
           <a:lstStyle/>
           <a:p>
-            <a:pPr indent="0" marL="0">
+            <a:pPr marL="0" indent="0">
               <a:buNone/>
             </a:pPr>
             <a:r>
@@ -3703,7 +3563,7 @@
           <a:bodyPr wrap="square" rtlCol="0" anchor="ctr"/>
           <a:lstStyle/>
           <a:p>
-            <a:pPr indent="0" marL="0">
+            <a:pPr marL="0" indent="0">
               <a:buNone/>
             </a:pPr>
             <a:r>
@@ -3737,6 +3597,13 @@
           </a:solidFill>
           <a:ln/>
         </p:spPr>
+        <p:txBody>
+          <a:bodyPr/>
+          <a:lstStyle/>
+          <a:p>
+            <a:endParaRPr lang="es-MX"/>
+          </a:p>
+        </p:txBody>
       </p:sp>
       <p:sp>
         <p:nvSpPr>
@@ -3759,7 +3626,7 @@
           <a:bodyPr wrap="square" rtlCol="0" anchor="ctr"/>
           <a:lstStyle/>
           <a:p>
-            <a:pPr algn="ctr" indent="0" marL="0">
+            <a:pPr marL="0" indent="0" algn="ctr">
               <a:buNone/>
             </a:pPr>
             <a:r>
@@ -3795,7 +3662,7 @@
           <a:bodyPr wrap="square" rtlCol="0" anchor="ctr"/>
           <a:lstStyle/>
           <a:p>
-            <a:pPr indent="0" marL="0">
+            <a:pPr marL="0" indent="0">
               <a:buNone/>
             </a:pPr>
             <a:r>
@@ -3831,7 +3698,7 @@
           <a:bodyPr wrap="square" rtlCol="0" anchor="ctr"/>
           <a:lstStyle/>
           <a:p>
-            <a:pPr indent="0" marL="0">
+            <a:pPr marL="0" indent="0">
               <a:buNone/>
             </a:pPr>
             <a:r>
@@ -3865,6 +3732,13 @@
           </a:solidFill>
           <a:ln/>
         </p:spPr>
+        <p:txBody>
+          <a:bodyPr/>
+          <a:lstStyle/>
+          <a:p>
+            <a:endParaRPr lang="es-MX"/>
+          </a:p>
+        </p:txBody>
       </p:sp>
       <p:sp>
         <p:nvSpPr>
@@ -3887,7 +3761,7 @@
           <a:bodyPr wrap="square" rtlCol="0" anchor="ctr"/>
           <a:lstStyle/>
           <a:p>
-            <a:pPr algn="ctr" indent="0" marL="0">
+            <a:pPr marL="0" indent="0" algn="ctr">
               <a:buNone/>
             </a:pPr>
             <a:r>
@@ -3923,7 +3797,7 @@
           <a:bodyPr wrap="square" rtlCol="0" anchor="ctr"/>
           <a:lstStyle/>
           <a:p>
-            <a:pPr indent="0" marL="0">
+            <a:pPr marL="0" indent="0">
               <a:buNone/>
             </a:pPr>
             <a:r>
@@ -3959,7 +3833,7 @@
           <a:bodyPr wrap="square" rtlCol="0" anchor="ctr"/>
           <a:lstStyle/>
           <a:p>
-            <a:pPr indent="0" marL="0">
+            <a:pPr marL="0" indent="0">
               <a:buNone/>
             </a:pPr>
             <a:r>
@@ -3990,6 +3864,7 @@
         <a:solidFill>
           <a:srgbClr val="1B2A4A"/>
         </a:solidFill>
+        <a:effectLst/>
       </p:bgPr>
     </p:bg>
     <p:spTree>
@@ -4027,6 +3902,13 @@
           </a:solidFill>
           <a:ln/>
         </p:spPr>
+        <p:txBody>
+          <a:bodyPr/>
+          <a:lstStyle/>
+          <a:p>
+            <a:endParaRPr lang="es-MX"/>
+          </a:p>
+        </p:txBody>
       </p:sp>
       <p:sp>
         <p:nvSpPr>
@@ -4047,6 +3929,13 @@
           </a:solidFill>
           <a:ln/>
         </p:spPr>
+        <p:txBody>
+          <a:bodyPr/>
+          <a:lstStyle/>
+          <a:p>
+            <a:endParaRPr lang="es-MX"/>
+          </a:p>
+        </p:txBody>
       </p:sp>
       <p:sp>
         <p:nvSpPr>
@@ -4069,11 +3958,11 @@
           <a:bodyPr wrap="square" rtlCol="0" anchor="ctr"/>
           <a:lstStyle/>
           <a:p>
-            <a:pPr indent="0" marL="0">
+            <a:pPr marL="0" indent="0">
               <a:buNone/>
             </a:pPr>
             <a:r>
-              <a:rPr lang="en-US" sz="1200" b="1" spc="400" kern="0" dirty="0">
+              <a:rPr lang="en-US" sz="1200" b="1" kern="0" spc="400" dirty="0">
                 <a:solidFill>
                   <a:srgbClr val="0D9488"/>
                 </a:solidFill>
@@ -4105,7 +3994,7 @@
           <a:bodyPr wrap="square" rtlCol="0" anchor="ctr"/>
           <a:lstStyle/>
           <a:p>
-            <a:pPr indent="0" marL="0">
+            <a:pPr marL="0" indent="0">
               <a:buNone/>
             </a:pPr>
             <a:r>
@@ -4145,6 +4034,13 @@
             <a:prstDash val="solid"/>
           </a:ln>
         </p:spPr>
+        <p:txBody>
+          <a:bodyPr/>
+          <a:lstStyle/>
+          <a:p>
+            <a:endParaRPr lang="es-MX"/>
+          </a:p>
+        </p:txBody>
       </p:sp>
       <p:sp>
         <p:nvSpPr>
@@ -4167,7 +4063,7 @@
           <a:bodyPr wrap="square" rtlCol="0" anchor="ctr"/>
           <a:lstStyle/>
           <a:p>
-            <a:pPr indent="0" marL="0">
+            <a:pPr marL="0" indent="0">
               <a:buNone/>
             </a:pPr>
             <a:r>
@@ -4206,6 +4102,13 @@
           </a:solidFill>
           <a:ln/>
         </p:spPr>
+        <p:txBody>
+          <a:bodyPr/>
+          <a:lstStyle/>
+          <a:p>
+            <a:endParaRPr lang="es-MX"/>
+          </a:p>
+        </p:txBody>
       </p:sp>
       <p:sp>
         <p:nvSpPr>
@@ -4228,7 +4131,7 @@
           <a:bodyPr wrap="square" rtlCol="0" anchor="ctr"/>
           <a:lstStyle/>
           <a:p>
-            <a:pPr algn="ctr" indent="0" marL="0">
+            <a:pPr marL="0" indent="0" algn="ctr">
               <a:buNone/>
             </a:pPr>
             <a:r>
@@ -4259,6 +4162,7 @@
         <a:solidFill>
           <a:srgbClr val="F8FAFC"/>
         </a:solidFill>
+        <a:effectLst/>
       </p:bgPr>
     </p:bg>
     <p:spTree>
@@ -4294,6 +4198,13 @@
           </a:solidFill>
           <a:ln/>
         </p:spPr>
+        <p:txBody>
+          <a:bodyPr/>
+          <a:lstStyle/>
+          <a:p>
+            <a:endParaRPr lang="es-MX"/>
+          </a:p>
+        </p:txBody>
       </p:sp>
       <p:sp>
         <p:nvSpPr>
@@ -4316,7 +4227,7 @@
           <a:bodyPr wrap="square" rtlCol="0" anchor="ctr"/>
           <a:lstStyle/>
           <a:p>
-            <a:pPr indent="0" marL="0">
+            <a:pPr marL="0" indent="0">
               <a:buNone/>
             </a:pPr>
             <a:r>
@@ -4355,7 +4266,7 @@
           <a:bodyPr wrap="square" rtlCol="0" anchor="ctr"/>
           <a:lstStyle/>
           <a:p>
-            <a:pPr indent="0" marL="0">
+            <a:pPr marL="0" indent="0">
               <a:buNone/>
             </a:pPr>
             <a:r>
@@ -4394,7 +4305,7 @@
           <a:bodyPr wrap="square" rtlCol="0" anchor="ctr"/>
           <a:lstStyle/>
           <a:p>
-            <a:pPr indent="0" marL="0">
+            <a:pPr marL="0" indent="0">
               <a:buNone/>
             </a:pPr>
             <a:r>
@@ -4433,7 +4344,7 @@
           <a:bodyPr wrap="square" rtlCol="0" anchor="ctr"/>
           <a:lstStyle/>
           <a:p>
-            <a:pPr indent="0" marL="0">
+            <a:pPr marL="0" indent="0">
               <a:buNone/>
             </a:pPr>
             <a:r>
@@ -4472,7 +4383,7 @@
           <a:bodyPr wrap="square" rtlCol="0" anchor="ctr"/>
           <a:lstStyle/>
           <a:p>
-            <a:pPr indent="0" marL="0">
+            <a:pPr marL="0" indent="0">
               <a:buNone/>
             </a:pPr>
             <a:r>
@@ -4511,7 +4422,7 @@
           <a:bodyPr wrap="square" rtlCol="0" anchor="ctr"/>
           <a:lstStyle/>
           <a:p>
-            <a:pPr indent="0" marL="0">
+            <a:pPr marL="0" indent="0">
               <a:buNone/>
             </a:pPr>
             <a:r>
@@ -4550,7 +4461,7 @@
           <a:bodyPr wrap="square" rtlCol="0" anchor="ctr"/>
           <a:lstStyle/>
           <a:p>
-            <a:pPr indent="0" marL="0">
+            <a:pPr marL="0" indent="0">
               <a:buNone/>
             </a:pPr>
             <a:r>
@@ -4589,7 +4500,7 @@
           <a:bodyPr wrap="square" rtlCol="0" anchor="ctr"/>
           <a:lstStyle/>
           <a:p>
-            <a:pPr indent="0" marL="0">
+            <a:pPr marL="0" indent="0">
               <a:buNone/>
             </a:pPr>
             <a:r>
@@ -4628,6 +4539,13 @@
           </a:solidFill>
           <a:ln/>
         </p:spPr>
+        <p:txBody>
+          <a:bodyPr/>
+          <a:lstStyle/>
+          <a:p>
+            <a:endParaRPr lang="es-MX"/>
+          </a:p>
+        </p:txBody>
       </p:sp>
     </p:spTree>
   </p:cSld>
@@ -4645,6 +4563,7 @@
         <a:solidFill>
           <a:srgbClr val="1B2A4A"/>
         </a:solidFill>
+        <a:effectLst/>
       </p:bgPr>
     </p:bg>
     <p:spTree>
@@ -4682,7 +4601,7 @@
           <a:bodyPr wrap="square" rtlCol="0" anchor="ctr"/>
           <a:lstStyle/>
           <a:p>
-            <a:pPr indent="0" marL="0">
+            <a:pPr marL="0" indent="0">
               <a:buNone/>
             </a:pPr>
             <a:r>
@@ -4721,7 +4640,7 @@
           <a:bodyPr wrap="square" rtlCol="0" anchor="ctr"/>
           <a:lstStyle/>
           <a:p>
-            <a:pPr indent="0" marL="0">
+            <a:pPr marL="0" indent="0">
               <a:buNone/>
             </a:pPr>
             <a:r>
@@ -4760,6 +4679,13 @@
           </a:solidFill>
           <a:ln/>
         </p:spPr>
+        <p:txBody>
+          <a:bodyPr/>
+          <a:lstStyle/>
+          <a:p>
+            <a:endParaRPr lang="es-MX"/>
+          </a:p>
+        </p:txBody>
       </p:sp>
       <p:sp>
         <p:nvSpPr>
@@ -4782,7 +4708,7 @@
           <a:bodyPr wrap="square" rtlCol="0" anchor="ctr"/>
           <a:lstStyle/>
           <a:p>
-            <a:pPr indent="0" marL="0">
+            <a:pPr marL="0" indent="0">
               <a:buNone/>
             </a:pPr>
             <a:r>
@@ -4818,7 +4744,7 @@
           <a:bodyPr wrap="square" rtlCol="0" anchor="ctr"/>
           <a:lstStyle/>
           <a:p>
-            <a:pPr indent="0" marL="0">
+            <a:pPr marL="0" indent="0">
               <a:buNone/>
             </a:pPr>
             <a:r>
@@ -4854,6 +4780,13 @@
           </a:solidFill>
           <a:ln/>
         </p:spPr>
+        <p:txBody>
+          <a:bodyPr/>
+          <a:lstStyle/>
+          <a:p>
+            <a:endParaRPr lang="es-MX"/>
+          </a:p>
+        </p:txBody>
       </p:sp>
       <p:sp>
         <p:nvSpPr>
@@ -4876,7 +4809,7 @@
           <a:bodyPr wrap="square" rtlCol="0" anchor="ctr"/>
           <a:lstStyle/>
           <a:p>
-            <a:pPr indent="0" marL="0">
+            <a:pPr marL="0" indent="0">
               <a:buNone/>
             </a:pPr>
             <a:r>
@@ -4912,7 +4845,7 @@
           <a:bodyPr wrap="square" rtlCol="0" anchor="ctr"/>
           <a:lstStyle/>
           <a:p>
-            <a:pPr indent="0" marL="0">
+            <a:pPr marL="0" indent="0">
               <a:buNone/>
             </a:pPr>
             <a:r>
@@ -4948,6 +4881,13 @@
           </a:solidFill>
           <a:ln/>
         </p:spPr>
+        <p:txBody>
+          <a:bodyPr/>
+          <a:lstStyle/>
+          <a:p>
+            <a:endParaRPr lang="es-MX"/>
+          </a:p>
+        </p:txBody>
       </p:sp>
       <p:sp>
         <p:nvSpPr>
@@ -4970,7 +4910,7 @@
           <a:bodyPr wrap="square" rtlCol="0" anchor="ctr"/>
           <a:lstStyle/>
           <a:p>
-            <a:pPr indent="0" marL="0">
+            <a:pPr marL="0" indent="0">
               <a:buNone/>
             </a:pPr>
             <a:r>
@@ -5006,7 +4946,7 @@
           <a:bodyPr wrap="square" rtlCol="0" anchor="ctr"/>
           <a:lstStyle/>
           <a:p>
-            <a:pPr indent="0" marL="0">
+            <a:pPr marL="0" indent="0">
               <a:buNone/>
             </a:pPr>
             <a:r>
@@ -5043,6 +4983,13 @@
             <a:prstDash val="solid"/>
           </a:ln>
         </p:spPr>
+        <p:txBody>
+          <a:bodyPr/>
+          <a:lstStyle/>
+          <a:p>
+            <a:endParaRPr lang="es-MX"/>
+          </a:p>
+        </p:txBody>
       </p:sp>
       <p:sp>
         <p:nvSpPr>
@@ -5065,6 +5012,13 @@
           </a:solidFill>
           <a:ln/>
         </p:spPr>
+        <p:txBody>
+          <a:bodyPr/>
+          <a:lstStyle/>
+          <a:p>
+            <a:endParaRPr lang="es-MX"/>
+          </a:p>
+        </p:txBody>
       </p:sp>
       <p:sp>
         <p:nvSpPr>
@@ -5087,7 +5041,7 @@
           <a:bodyPr wrap="square" rtlCol="0" anchor="ctr"/>
           <a:lstStyle/>
           <a:p>
-            <a:pPr indent="0" marL="0">
+            <a:pPr marL="0" indent="0">
               <a:buNone/>
             </a:pPr>
             <a:r>
@@ -5123,7 +5077,7 @@
           <a:bodyPr wrap="square" rtlCol="0" anchor="ctr"/>
           <a:lstStyle/>
           <a:p>
-            <a:pPr indent="0" marL="0">
+            <a:pPr marL="0" indent="0">
               <a:buNone/>
             </a:pPr>
             <a:r>
@@ -5159,6 +5113,13 @@
           </a:solidFill>
           <a:ln/>
         </p:spPr>
+        <p:txBody>
+          <a:bodyPr/>
+          <a:lstStyle/>
+          <a:p>
+            <a:endParaRPr lang="es-MX"/>
+          </a:p>
+        </p:txBody>
       </p:sp>
       <p:sp>
         <p:nvSpPr>
@@ -5181,7 +5142,7 @@
           <a:bodyPr wrap="square" rtlCol="0" anchor="ctr"/>
           <a:lstStyle/>
           <a:p>
-            <a:pPr indent="0" marL="0">
+            <a:pPr marL="0" indent="0">
               <a:buNone/>
             </a:pPr>
             <a:r>
@@ -5217,7 +5178,7 @@
           <a:bodyPr wrap="square" rtlCol="0" anchor="ctr"/>
           <a:lstStyle/>
           <a:p>
-            <a:pPr indent="0" marL="0">
+            <a:pPr marL="0" indent="0">
               <a:buNone/>
             </a:pPr>
             <a:r>
@@ -5248,6 +5209,7 @@
         <a:solidFill>
           <a:srgbClr val="F8FAFC"/>
         </a:solidFill>
+        <a:effectLst/>
       </p:bgPr>
     </p:bg>
     <p:spTree>
@@ -5283,6 +5245,13 @@
           </a:solidFill>
           <a:ln/>
         </p:spPr>
+        <p:txBody>
+          <a:bodyPr/>
+          <a:lstStyle/>
+          <a:p>
+            <a:endParaRPr lang="es-MX"/>
+          </a:p>
+        </p:txBody>
       </p:sp>
       <p:sp>
         <p:nvSpPr>
@@ -5305,7 +5274,7 @@
           <a:bodyPr wrap="square" rtlCol="0" anchor="ctr"/>
           <a:lstStyle/>
           <a:p>
-            <a:pPr indent="0" marL="0">
+            <a:pPr marL="0" indent="0">
               <a:buNone/>
             </a:pPr>
             <a:r>
@@ -5342,13 +5311,20 @@
           </a:solidFill>
           <a:ln/>
           <a:effectLst>
-            <a:outerShdw sx="100000" sy="100000" kx="0" ky="0" algn="bl" rotWithShape="0" blurRad="101600" dist="38100" dir="16200000">
+            <a:outerShdw blurRad="101600" dist="38100" dir="16200000" algn="bl" rotWithShape="0">
               <a:srgbClr val="000000">
                 <a:alpha val="12000"/>
               </a:srgbClr>
             </a:outerShdw>
           </a:effectLst>
         </p:spPr>
+        <p:txBody>
+          <a:bodyPr/>
+          <a:lstStyle/>
+          <a:p>
+            <a:endParaRPr lang="es-MX"/>
+          </a:p>
+        </p:txBody>
       </p:sp>
       <p:sp>
         <p:nvSpPr>
@@ -5369,6 +5345,13 @@
           </a:solidFill>
           <a:ln/>
         </p:spPr>
+        <p:txBody>
+          <a:bodyPr/>
+          <a:lstStyle/>
+          <a:p>
+            <a:endParaRPr lang="es-MX"/>
+          </a:p>
+        </p:txBody>
       </p:sp>
       <p:sp>
         <p:nvSpPr>
@@ -5391,7 +5374,7 @@
           <a:bodyPr wrap="square" rtlCol="0" anchor="ctr"/>
           <a:lstStyle/>
           <a:p>
-            <a:pPr indent="0" marL="0">
+            <a:pPr marL="0" indent="0">
               <a:buNone/>
             </a:pPr>
             <a:r>
@@ -5427,7 +5410,7 @@
           <a:bodyPr wrap="square" rtlCol="0" anchor="ctr"/>
           <a:lstStyle/>
           <a:p>
-            <a:pPr indent="0" marL="0">
+            <a:pPr marL="0" indent="0">
               <a:buNone/>
             </a:pPr>
             <a:r>
@@ -5463,7 +5446,7 @@
           <a:bodyPr wrap="square" rtlCol="0" anchor="ctr"/>
           <a:lstStyle/>
           <a:p>
-            <a:pPr indent="0" marL="0">
+            <a:pPr marL="0" indent="0">
               <a:buNone/>
             </a:pPr>
             <a:r>
@@ -5497,13 +5480,20 @@
           </a:solidFill>
           <a:ln/>
           <a:effectLst>
-            <a:outerShdw sx="100000" sy="100000" kx="0" ky="0" algn="bl" rotWithShape="0" blurRad="101600" dist="38100" dir="16200000">
+            <a:outerShdw blurRad="101600" dist="38100" dir="16200000" algn="bl" rotWithShape="0">
               <a:srgbClr val="000000">
                 <a:alpha val="12000"/>
               </a:srgbClr>
             </a:outerShdw>
           </a:effectLst>
         </p:spPr>
+        <p:txBody>
+          <a:bodyPr/>
+          <a:lstStyle/>
+          <a:p>
+            <a:endParaRPr lang="es-MX"/>
+          </a:p>
+        </p:txBody>
       </p:sp>
       <p:sp>
         <p:nvSpPr>
@@ -5524,6 +5514,13 @@
           </a:solidFill>
           <a:ln/>
         </p:spPr>
+        <p:txBody>
+          <a:bodyPr/>
+          <a:lstStyle/>
+          <a:p>
+            <a:endParaRPr lang="es-MX"/>
+          </a:p>
+        </p:txBody>
       </p:sp>
       <p:sp>
         <p:nvSpPr>
@@ -5546,7 +5543,7 @@
           <a:bodyPr wrap="square" rtlCol="0" anchor="ctr"/>
           <a:lstStyle/>
           <a:p>
-            <a:pPr indent="0" marL="0">
+            <a:pPr marL="0" indent="0">
               <a:buNone/>
             </a:pPr>
             <a:r>
@@ -5582,7 +5579,7 @@
           <a:bodyPr wrap="square" rtlCol="0" anchor="ctr"/>
           <a:lstStyle/>
           <a:p>
-            <a:pPr indent="0" marL="0">
+            <a:pPr marL="0" indent="0">
               <a:buNone/>
             </a:pPr>
             <a:r>
@@ -5618,7 +5615,7 @@
           <a:bodyPr wrap="square" rtlCol="0" anchor="ctr"/>
           <a:lstStyle/>
           <a:p>
-            <a:pPr indent="0" marL="0">
+            <a:pPr marL="0" indent="0">
               <a:buNone/>
             </a:pPr>
             <a:r>
@@ -5652,13 +5649,20 @@
           </a:solidFill>
           <a:ln/>
           <a:effectLst>
-            <a:outerShdw sx="100000" sy="100000" kx="0" ky="0" algn="bl" rotWithShape="0" blurRad="101600" dist="38100" dir="16200000">
+            <a:outerShdw blurRad="101600" dist="38100" dir="16200000" algn="bl" rotWithShape="0">
               <a:srgbClr val="000000">
                 <a:alpha val="12000"/>
               </a:srgbClr>
             </a:outerShdw>
           </a:effectLst>
         </p:spPr>
+        <p:txBody>
+          <a:bodyPr/>
+          <a:lstStyle/>
+          <a:p>
+            <a:endParaRPr lang="es-MX"/>
+          </a:p>
+        </p:txBody>
       </p:sp>
       <p:sp>
         <p:nvSpPr>
@@ -5679,6 +5683,13 @@
           </a:solidFill>
           <a:ln/>
         </p:spPr>
+        <p:txBody>
+          <a:bodyPr/>
+          <a:lstStyle/>
+          <a:p>
+            <a:endParaRPr lang="es-MX"/>
+          </a:p>
+        </p:txBody>
       </p:sp>
       <p:sp>
         <p:nvSpPr>
@@ -5701,7 +5712,7 @@
           <a:bodyPr wrap="square" rtlCol="0" anchor="ctr"/>
           <a:lstStyle/>
           <a:p>
-            <a:pPr indent="0" marL="0">
+            <a:pPr marL="0" indent="0">
               <a:buNone/>
             </a:pPr>
             <a:r>
@@ -5737,7 +5748,7 @@
           <a:bodyPr wrap="square" rtlCol="0" anchor="ctr"/>
           <a:lstStyle/>
           <a:p>
-            <a:pPr indent="0" marL="0">
+            <a:pPr marL="0" indent="0">
               <a:buNone/>
             </a:pPr>
             <a:r>
@@ -5773,7 +5784,7 @@
           <a:bodyPr wrap="square" rtlCol="0" anchor="ctr"/>
           <a:lstStyle/>
           <a:p>
-            <a:pPr indent="0" marL="0">
+            <a:pPr marL="0" indent="0">
               <a:buNone/>
             </a:pPr>
             <a:r>
@@ -5807,13 +5818,20 @@
           </a:solidFill>
           <a:ln/>
           <a:effectLst>
-            <a:outerShdw sx="100000" sy="100000" kx="0" ky="0" algn="bl" rotWithShape="0" blurRad="101600" dist="38100" dir="16200000">
+            <a:outerShdw blurRad="101600" dist="38100" dir="16200000" algn="bl" rotWithShape="0">
               <a:srgbClr val="000000">
                 <a:alpha val="12000"/>
               </a:srgbClr>
             </a:outerShdw>
           </a:effectLst>
         </p:spPr>
+        <p:txBody>
+          <a:bodyPr/>
+          <a:lstStyle/>
+          <a:p>
+            <a:endParaRPr lang="es-MX"/>
+          </a:p>
+        </p:txBody>
       </p:sp>
       <p:sp>
         <p:nvSpPr>
@@ -5834,6 +5852,13 @@
           </a:solidFill>
           <a:ln/>
         </p:spPr>
+        <p:txBody>
+          <a:bodyPr/>
+          <a:lstStyle/>
+          <a:p>
+            <a:endParaRPr lang="es-MX"/>
+          </a:p>
+        </p:txBody>
       </p:sp>
       <p:sp>
         <p:nvSpPr>
@@ -5856,7 +5881,7 @@
           <a:bodyPr wrap="square" rtlCol="0" anchor="ctr"/>
           <a:lstStyle/>
           <a:p>
-            <a:pPr indent="0" marL="0">
+            <a:pPr marL="0" indent="0">
               <a:buNone/>
             </a:pPr>
             <a:r>
@@ -5892,7 +5917,7 @@
           <a:bodyPr wrap="square" rtlCol="0" anchor="ctr"/>
           <a:lstStyle/>
           <a:p>
-            <a:pPr indent="0" marL="0">
+            <a:pPr marL="0" indent="0">
               <a:buNone/>
             </a:pPr>
             <a:r>
@@ -5928,7 +5953,7 @@
           <a:bodyPr wrap="square" rtlCol="0" anchor="ctr"/>
           <a:lstStyle/>
           <a:p>
-            <a:pPr indent="0" marL="0">
+            <a:pPr marL="0" indent="0">
               <a:buNone/>
             </a:pPr>
             <a:r>
@@ -5962,13 +5987,20 @@
           </a:solidFill>
           <a:ln/>
           <a:effectLst>
-            <a:outerShdw sx="100000" sy="100000" kx="0" ky="0" algn="bl" rotWithShape="0" blurRad="101600" dist="38100" dir="16200000">
+            <a:outerShdw blurRad="101600" dist="38100" dir="16200000" algn="bl" rotWithShape="0">
               <a:srgbClr val="000000">
                 <a:alpha val="12000"/>
               </a:srgbClr>
             </a:outerShdw>
           </a:effectLst>
         </p:spPr>
+        <p:txBody>
+          <a:bodyPr/>
+          <a:lstStyle/>
+          <a:p>
+            <a:endParaRPr lang="es-MX"/>
+          </a:p>
+        </p:txBody>
       </p:sp>
       <p:sp>
         <p:nvSpPr>
@@ -5989,6 +6021,13 @@
           </a:solidFill>
           <a:ln/>
         </p:spPr>
+        <p:txBody>
+          <a:bodyPr/>
+          <a:lstStyle/>
+          <a:p>
+            <a:endParaRPr lang="es-MX"/>
+          </a:p>
+        </p:txBody>
       </p:sp>
       <p:sp>
         <p:nvSpPr>
@@ -6011,7 +6050,7 @@
           <a:bodyPr wrap="square" rtlCol="0" anchor="ctr"/>
           <a:lstStyle/>
           <a:p>
-            <a:pPr indent="0" marL="0">
+            <a:pPr marL="0" indent="0">
               <a:buNone/>
             </a:pPr>
             <a:r>
@@ -6047,7 +6086,7 @@
           <a:bodyPr wrap="square" rtlCol="0" anchor="ctr"/>
           <a:lstStyle/>
           <a:p>
-            <a:pPr indent="0" marL="0">
+            <a:pPr marL="0" indent="0">
               <a:buNone/>
             </a:pPr>
             <a:r>
@@ -6083,7 +6122,7 @@
           <a:bodyPr wrap="square" rtlCol="0" anchor="ctr"/>
           <a:lstStyle/>
           <a:p>
-            <a:pPr indent="0" marL="0">
+            <a:pPr marL="0" indent="0">
               <a:buNone/>
             </a:pPr>
             <a:r>
@@ -6119,7 +6158,7 @@
           <a:bodyPr wrap="square" rtlCol="0" anchor="ctr"/>
           <a:lstStyle/>
           <a:p>
-            <a:pPr indent="0" marL="0">
+            <a:pPr marL="0" indent="0">
               <a:buNone/>
             </a:pPr>
             <a:r>
@@ -6150,6 +6189,7 @@
         <a:solidFill>
           <a:srgbClr val="F8FAFC"/>
         </a:solidFill>
+        <a:effectLst/>
       </p:bgPr>
     </p:bg>
     <p:spTree>
@@ -6185,6 +6225,13 @@
           </a:solidFill>
           <a:ln/>
         </p:spPr>
+        <p:txBody>
+          <a:bodyPr/>
+          <a:lstStyle/>
+          <a:p>
+            <a:endParaRPr lang="es-MX"/>
+          </a:p>
+        </p:txBody>
       </p:sp>
       <p:sp>
         <p:nvSpPr>
@@ -6207,7 +6254,7 @@
           <a:bodyPr wrap="square" rtlCol="0" anchor="ctr"/>
           <a:lstStyle/>
           <a:p>
-            <a:pPr indent="0" marL="0">
+            <a:pPr marL="0" indent="0">
               <a:buNone/>
             </a:pPr>
             <a:r>
@@ -6246,7 +6293,7 @@
           <a:bodyPr wrap="square" rtlCol="0" anchor="ctr"/>
           <a:lstStyle/>
           <a:p>
-            <a:pPr indent="0" marL="0">
+            <a:pPr marL="0" indent="0">
               <a:buNone/>
             </a:pPr>
             <a:r>
@@ -6282,6 +6329,13 @@
           </a:solidFill>
           <a:ln/>
         </p:spPr>
+        <p:txBody>
+          <a:bodyPr/>
+          <a:lstStyle/>
+          <a:p>
+            <a:endParaRPr lang="es-MX"/>
+          </a:p>
+        </p:txBody>
       </p:sp>
       <p:sp>
         <p:nvSpPr>
@@ -6304,7 +6358,7 @@
           <a:bodyPr wrap="square" rtlCol="0" anchor="ctr"/>
           <a:lstStyle/>
           <a:p>
-            <a:pPr indent="0" marL="0">
+            <a:pPr marL="0" indent="0">
               <a:buNone/>
             </a:pPr>
             <a:r>
@@ -6340,7 +6394,7 @@
           <a:bodyPr wrap="square" rtlCol="0" anchor="ctr"/>
           <a:lstStyle/>
           <a:p>
-            <a:pPr indent="0" marL="0">
+            <a:pPr marL="0" indent="0">
               <a:buNone/>
             </a:pPr>
             <a:r>
@@ -6376,6 +6430,13 @@
           </a:solidFill>
           <a:ln/>
         </p:spPr>
+        <p:txBody>
+          <a:bodyPr/>
+          <a:lstStyle/>
+          <a:p>
+            <a:endParaRPr lang="es-MX"/>
+          </a:p>
+        </p:txBody>
       </p:sp>
       <p:sp>
         <p:nvSpPr>
@@ -6398,7 +6459,7 @@
           <a:bodyPr wrap="square" rtlCol="0" anchor="ctr"/>
           <a:lstStyle/>
           <a:p>
-            <a:pPr indent="0" marL="0">
+            <a:pPr marL="0" indent="0">
               <a:buNone/>
             </a:pPr>
             <a:r>
@@ -6434,7 +6495,7 @@
           <a:bodyPr wrap="square" rtlCol="0" anchor="ctr"/>
           <a:lstStyle/>
           <a:p>
-            <a:pPr indent="0" marL="0">
+            <a:pPr marL="0" indent="0">
               <a:buNone/>
             </a:pPr>
             <a:r>
@@ -6470,6 +6531,13 @@
           </a:solidFill>
           <a:ln/>
         </p:spPr>
+        <p:txBody>
+          <a:bodyPr/>
+          <a:lstStyle/>
+          <a:p>
+            <a:endParaRPr lang="es-MX"/>
+          </a:p>
+        </p:txBody>
       </p:sp>
       <p:sp>
         <p:nvSpPr>
@@ -6492,7 +6560,7 @@
           <a:bodyPr wrap="square" rtlCol="0" anchor="ctr"/>
           <a:lstStyle/>
           <a:p>
-            <a:pPr indent="0" marL="0">
+            <a:pPr marL="0" indent="0">
               <a:buNone/>
             </a:pPr>
             <a:r>
@@ -6528,7 +6596,7 @@
           <a:bodyPr wrap="square" rtlCol="0" anchor="ctr"/>
           <a:lstStyle/>
           <a:p>
-            <a:pPr indent="0" marL="0">
+            <a:pPr marL="0" indent="0">
               <a:buNone/>
             </a:pPr>
             <a:r>
@@ -6545,7 +6613,7 @@
       </p:sp>
       <p:graphicFrame>
         <p:nvGraphicFramePr>
-          <p:cNvPr id="14" name="Chart 0" descr=""/>
+          <p:cNvPr id="14" name="Chart 0"/>
           <p:cNvGraphicFramePr/>
           <p:nvPr/>
         </p:nvGraphicFramePr>
@@ -6553,9 +6621,9 @@
           <a:off x="4572000" y="1005840"/>
           <a:ext cx="4206240" cy="3657600"/>
         </p:xfrm>
-        <a:graphic xmlns:a="http://schemas.openxmlformats.org/drawingml/2006/main">
+        <a:graphic>
           <a:graphicData uri="http://schemas.openxmlformats.org/drawingml/2006/chart">
-            <c:chart xmlns:c="http://schemas.openxmlformats.org/drawingml/2006/chart" r:id="rId1"/>
+            <c:chart xmlns:c="http://schemas.openxmlformats.org/drawingml/2006/chart" xmlns:r="http://schemas.openxmlformats.org/officeDocument/2006/relationships" r:id="rId3"/>
           </a:graphicData>
         </a:graphic>
       </p:graphicFrame>
@@ -6575,6 +6643,7 @@
         <a:solidFill>
           <a:srgbClr val="1B2A4A"/>
         </a:solidFill>
+        <a:effectLst/>
       </p:bgPr>
     </p:bg>
     <p:spTree>
@@ -6612,6 +6681,13 @@
           </a:solidFill>
           <a:ln/>
         </p:spPr>
+        <p:txBody>
+          <a:bodyPr/>
+          <a:lstStyle/>
+          <a:p>
+            <a:endParaRPr lang="es-MX"/>
+          </a:p>
+        </p:txBody>
       </p:sp>
       <p:sp>
         <p:nvSpPr>
@@ -6634,6 +6710,13 @@
           </a:solidFill>
           <a:ln/>
         </p:spPr>
+        <p:txBody>
+          <a:bodyPr/>
+          <a:lstStyle/>
+          <a:p>
+            <a:endParaRPr lang="es-MX"/>
+          </a:p>
+        </p:txBody>
       </p:sp>
       <p:sp>
         <p:nvSpPr>
@@ -6654,6 +6737,13 @@
           </a:solidFill>
           <a:ln/>
         </p:spPr>
+        <p:txBody>
+          <a:bodyPr/>
+          <a:lstStyle/>
+          <a:p>
+            <a:endParaRPr lang="es-MX"/>
+          </a:p>
+        </p:txBody>
       </p:sp>
       <p:sp>
         <p:nvSpPr>
@@ -6676,11 +6766,11 @@
           <a:bodyPr wrap="square" rtlCol="0" anchor="ctr"/>
           <a:lstStyle/>
           <a:p>
-            <a:pPr indent="0" marL="0">
+            <a:pPr marL="0" indent="0">
               <a:buNone/>
             </a:pPr>
             <a:r>
-              <a:rPr lang="en-US" sz="1200" b="1" spc="400" kern="0" dirty="0">
+              <a:rPr lang="en-US" sz="1200" b="1" kern="0" spc="400" dirty="0">
                 <a:solidFill>
                   <a:srgbClr val="0D9488"/>
                 </a:solidFill>
@@ -6712,7 +6802,7 @@
           <a:bodyPr wrap="square" rtlCol="0" anchor="ctr"/>
           <a:lstStyle/>
           <a:p>
-            <a:pPr indent="0" marL="0">
+            <a:pPr marL="0" indent="0">
               <a:buNone/>
             </a:pPr>
             <a:r>
@@ -6751,7 +6841,7 @@
           <a:bodyPr wrap="square" rtlCol="0" anchor="ctr"/>
           <a:lstStyle/>
           <a:p>
-            <a:pPr indent="0" marL="0">
+            <a:pPr marL="0" indent="0">
               <a:buNone/>
             </a:pPr>
             <a:r>
@@ -6791,6 +6881,13 @@
             <a:prstDash val="solid"/>
           </a:ln>
         </p:spPr>
+        <p:txBody>
+          <a:bodyPr/>
+          <a:lstStyle/>
+          <a:p>
+            <a:endParaRPr lang="es-MX"/>
+          </a:p>
+        </p:txBody>
       </p:sp>
       <p:sp>
         <p:nvSpPr>
@@ -6813,7 +6910,7 @@
           <a:bodyPr wrap="square" rtlCol="0" anchor="ctr"/>
           <a:lstStyle/>
           <a:p>
-            <a:pPr indent="0" marL="0">
+            <a:pPr marL="0" indent="0">
               <a:buNone/>
             </a:pPr>
             <a:r>
@@ -6847,6 +6944,7 @@
         <a:solidFill>
           <a:srgbClr val="F8FAFC"/>
         </a:solidFill>
+        <a:effectLst/>
       </p:bgPr>
     </p:bg>
     <p:spTree>
@@ -6882,6 +6980,13 @@
           </a:solidFill>
           <a:ln/>
         </p:spPr>
+        <p:txBody>
+          <a:bodyPr/>
+          <a:lstStyle/>
+          <a:p>
+            <a:endParaRPr lang="es-MX"/>
+          </a:p>
+        </p:txBody>
       </p:sp>
       <p:sp>
         <p:nvSpPr>
@@ -6904,7 +7009,7 @@
           <a:bodyPr wrap="square" rtlCol="0" anchor="ctr"/>
           <a:lstStyle/>
           <a:p>
-            <a:pPr indent="0" marL="0">
+            <a:pPr marL="0" indent="0">
               <a:buNone/>
             </a:pPr>
             <a:r>
@@ -6941,13 +7046,20 @@
           </a:solidFill>
           <a:ln/>
           <a:effectLst>
-            <a:outerShdw sx="100000" sy="100000" kx="0" ky="0" algn="bl" rotWithShape="0" blurRad="101600" dist="38100" dir="16200000">
+            <a:outerShdw blurRad="101600" dist="38100" dir="16200000" algn="bl" rotWithShape="0">
               <a:srgbClr val="000000">
                 <a:alpha val="12000"/>
               </a:srgbClr>
             </a:outerShdw>
           </a:effectLst>
         </p:spPr>
+        <p:txBody>
+          <a:bodyPr/>
+          <a:lstStyle/>
+          <a:p>
+            <a:endParaRPr lang="es-MX"/>
+          </a:p>
+        </p:txBody>
       </p:sp>
       <p:sp>
         <p:nvSpPr>
@@ -6968,6 +7080,13 @@
           </a:solidFill>
           <a:ln/>
         </p:spPr>
+        <p:txBody>
+          <a:bodyPr/>
+          <a:lstStyle/>
+          <a:p>
+            <a:endParaRPr lang="es-MX"/>
+          </a:p>
+        </p:txBody>
       </p:sp>
       <p:sp>
         <p:nvSpPr>
@@ -6990,7 +7109,7 @@
           <a:bodyPr wrap="square" rtlCol="0" anchor="ctr"/>
           <a:lstStyle/>
           <a:p>
-            <a:pPr indent="0" marL="0">
+            <a:pPr marL="0" indent="0">
               <a:buNone/>
             </a:pPr>
             <a:r>
@@ -7026,7 +7145,7 @@
           <a:bodyPr wrap="square" rtlCol="0" anchor="ctr"/>
           <a:lstStyle/>
           <a:p>
-            <a:pPr indent="0" marL="0">
+            <a:pPr marL="0" indent="0">
               <a:buNone/>
             </a:pPr>
             <a:r>
@@ -7060,13 +7179,20 @@
           </a:solidFill>
           <a:ln/>
           <a:effectLst>
-            <a:outerShdw sx="100000" sy="100000" kx="0" ky="0" algn="bl" rotWithShape="0" blurRad="101600" dist="38100" dir="16200000">
+            <a:outerShdw blurRad="101600" dist="38100" dir="16200000" algn="bl" rotWithShape="0">
               <a:srgbClr val="000000">
                 <a:alpha val="12000"/>
               </a:srgbClr>
             </a:outerShdw>
           </a:effectLst>
         </p:spPr>
+        <p:txBody>
+          <a:bodyPr/>
+          <a:lstStyle/>
+          <a:p>
+            <a:endParaRPr lang="es-MX"/>
+          </a:p>
+        </p:txBody>
       </p:sp>
       <p:sp>
         <p:nvSpPr>
@@ -7087,6 +7213,13 @@
           </a:solidFill>
           <a:ln/>
         </p:spPr>
+        <p:txBody>
+          <a:bodyPr/>
+          <a:lstStyle/>
+          <a:p>
+            <a:endParaRPr lang="es-MX"/>
+          </a:p>
+        </p:txBody>
       </p:sp>
       <p:sp>
         <p:nvSpPr>
@@ -7109,7 +7242,7 @@
           <a:bodyPr wrap="square" rtlCol="0" anchor="ctr"/>
           <a:lstStyle/>
           <a:p>
-            <a:pPr indent="0" marL="0">
+            <a:pPr marL="0" indent="0">
               <a:buNone/>
             </a:pPr>
             <a:r>
@@ -7145,7 +7278,7 @@
           <a:bodyPr wrap="square" rtlCol="0" anchor="ctr"/>
           <a:lstStyle/>
           <a:p>
-            <a:pPr indent="0" marL="0">
+            <a:pPr marL="0" indent="0">
               <a:buNone/>
             </a:pPr>
             <a:r>
@@ -7179,13 +7312,20 @@
           </a:solidFill>
           <a:ln/>
           <a:effectLst>
-            <a:outerShdw sx="100000" sy="100000" kx="0" ky="0" algn="bl" rotWithShape="0" blurRad="101600" dist="38100" dir="16200000">
+            <a:outerShdw blurRad="101600" dist="38100" dir="16200000" algn="bl" rotWithShape="0">
               <a:srgbClr val="000000">
                 <a:alpha val="12000"/>
               </a:srgbClr>
             </a:outerShdw>
           </a:effectLst>
         </p:spPr>
+        <p:txBody>
+          <a:bodyPr/>
+          <a:lstStyle/>
+          <a:p>
+            <a:endParaRPr lang="es-MX"/>
+          </a:p>
+        </p:txBody>
       </p:sp>
       <p:sp>
         <p:nvSpPr>
@@ -7206,6 +7346,13 @@
           </a:solidFill>
           <a:ln/>
         </p:spPr>
+        <p:txBody>
+          <a:bodyPr/>
+          <a:lstStyle/>
+          <a:p>
+            <a:endParaRPr lang="es-MX"/>
+          </a:p>
+        </p:txBody>
       </p:sp>
       <p:sp>
         <p:nvSpPr>
@@ -7228,7 +7375,7 @@
           <a:bodyPr wrap="square" rtlCol="0" anchor="ctr"/>
           <a:lstStyle/>
           <a:p>
-            <a:pPr indent="0" marL="0">
+            <a:pPr marL="0" indent="0">
               <a:buNone/>
             </a:pPr>
             <a:r>
@@ -7264,7 +7411,7 @@
           <a:bodyPr wrap="square" rtlCol="0" anchor="ctr"/>
           <a:lstStyle/>
           <a:p>
-            <a:pPr indent="0" marL="0">
+            <a:pPr marL="0" indent="0">
               <a:buNone/>
             </a:pPr>
             <a:r>
@@ -7298,13 +7445,20 @@
           </a:solidFill>
           <a:ln/>
           <a:effectLst>
-            <a:outerShdw sx="100000" sy="100000" kx="0" ky="0" algn="bl" rotWithShape="0" blurRad="101600" dist="38100" dir="16200000">
+            <a:outerShdw blurRad="101600" dist="38100" dir="16200000" algn="bl" rotWithShape="0">
               <a:srgbClr val="000000">
                 <a:alpha val="12000"/>
               </a:srgbClr>
             </a:outerShdw>
           </a:effectLst>
         </p:spPr>
+        <p:txBody>
+          <a:bodyPr/>
+          <a:lstStyle/>
+          <a:p>
+            <a:endParaRPr lang="es-MX"/>
+          </a:p>
+        </p:txBody>
       </p:sp>
       <p:sp>
         <p:nvSpPr>
@@ -7325,6 +7479,13 @@
           </a:solidFill>
           <a:ln/>
         </p:spPr>
+        <p:txBody>
+          <a:bodyPr/>
+          <a:lstStyle/>
+          <a:p>
+            <a:endParaRPr lang="es-MX"/>
+          </a:p>
+        </p:txBody>
       </p:sp>
       <p:sp>
         <p:nvSpPr>
@@ -7347,7 +7508,7 @@
           <a:bodyPr wrap="square" rtlCol="0" anchor="ctr"/>
           <a:lstStyle/>
           <a:p>
-            <a:pPr indent="0" marL="0">
+            <a:pPr marL="0" indent="0">
               <a:buNone/>
             </a:pPr>
             <a:r>
@@ -7383,7 +7544,7 @@
           <a:bodyPr wrap="square" rtlCol="0" anchor="ctr"/>
           <a:lstStyle/>
           <a:p>
-            <a:pPr indent="0" marL="0">
+            <a:pPr marL="0" indent="0">
               <a:buNone/>
             </a:pPr>
             <a:r>
@@ -7417,13 +7578,20 @@
           </a:solidFill>
           <a:ln/>
           <a:effectLst>
-            <a:outerShdw sx="100000" sy="100000" kx="0" ky="0" algn="bl" rotWithShape="0" blurRad="101600" dist="38100" dir="16200000">
+            <a:outerShdw blurRad="101600" dist="38100" dir="16200000" algn="bl" rotWithShape="0">
               <a:srgbClr val="000000">
                 <a:alpha val="12000"/>
               </a:srgbClr>
             </a:outerShdw>
           </a:effectLst>
         </p:spPr>
+        <p:txBody>
+          <a:bodyPr/>
+          <a:lstStyle/>
+          <a:p>
+            <a:endParaRPr lang="es-MX"/>
+          </a:p>
+        </p:txBody>
       </p:sp>
       <p:sp>
         <p:nvSpPr>
@@ -7444,6 +7612,13 @@
           </a:solidFill>
           <a:ln/>
         </p:spPr>
+        <p:txBody>
+          <a:bodyPr/>
+          <a:lstStyle/>
+          <a:p>
+            <a:endParaRPr lang="es-MX"/>
+          </a:p>
+        </p:txBody>
       </p:sp>
       <p:sp>
         <p:nvSpPr>
@@ -7466,7 +7641,7 @@
           <a:bodyPr wrap="square" rtlCol="0" anchor="ctr"/>
           <a:lstStyle/>
           <a:p>
-            <a:pPr indent="0" marL="0">
+            <a:pPr marL="0" indent="0">
               <a:buNone/>
             </a:pPr>
             <a:r>
@@ -7502,7 +7677,7 @@
           <a:bodyPr wrap="square" rtlCol="0" anchor="ctr"/>
           <a:lstStyle/>
           <a:p>
-            <a:pPr indent="0" marL="0">
+            <a:pPr marL="0" indent="0">
               <a:buNone/>
             </a:pPr>
             <a:r>
@@ -7536,13 +7711,20 @@
           </a:solidFill>
           <a:ln/>
           <a:effectLst>
-            <a:outerShdw sx="100000" sy="100000" kx="0" ky="0" algn="bl" rotWithShape="0" blurRad="101600" dist="38100" dir="16200000">
+            <a:outerShdw blurRad="101600" dist="38100" dir="16200000" algn="bl" rotWithShape="0">
               <a:srgbClr val="000000">
                 <a:alpha val="12000"/>
               </a:srgbClr>
             </a:outerShdw>
           </a:effectLst>
         </p:spPr>
+        <p:txBody>
+          <a:bodyPr/>
+          <a:lstStyle/>
+          <a:p>
+            <a:endParaRPr lang="es-MX"/>
+          </a:p>
+        </p:txBody>
       </p:sp>
       <p:sp>
         <p:nvSpPr>
@@ -7563,6 +7745,13 @@
           </a:solidFill>
           <a:ln/>
         </p:spPr>
+        <p:txBody>
+          <a:bodyPr/>
+          <a:lstStyle/>
+          <a:p>
+            <a:endParaRPr lang="es-MX"/>
+          </a:p>
+        </p:txBody>
       </p:sp>
       <p:sp>
         <p:nvSpPr>
@@ -7585,7 +7774,7 @@
           <a:bodyPr wrap="square" rtlCol="0" anchor="ctr"/>
           <a:lstStyle/>
           <a:p>
-            <a:pPr indent="0" marL="0">
+            <a:pPr marL="0" indent="0">
               <a:buNone/>
             </a:pPr>
             <a:r>
@@ -7621,7 +7810,7 @@
           <a:bodyPr wrap="square" rtlCol="0" anchor="ctr"/>
           <a:lstStyle/>
           <a:p>
-            <a:pPr indent="0" marL="0">
+            <a:pPr marL="0" indent="0">
               <a:buNone/>
             </a:pPr>
             <a:r>
@@ -7652,6 +7841,7 @@
         <a:solidFill>
           <a:srgbClr val="F8FAFC"/>
         </a:solidFill>
+        <a:effectLst/>
       </p:bgPr>
     </p:bg>
     <p:spTree>
@@ -7687,6 +7877,13 @@
           </a:solidFill>
           <a:ln/>
         </p:spPr>
+        <p:txBody>
+          <a:bodyPr/>
+          <a:lstStyle/>
+          <a:p>
+            <a:endParaRPr lang="es-MX"/>
+          </a:p>
+        </p:txBody>
       </p:sp>
       <p:sp>
         <p:nvSpPr>
@@ -7709,7 +7906,7 @@
           <a:bodyPr wrap="square" rtlCol="0" anchor="ctr"/>
           <a:lstStyle/>
           <a:p>
-            <a:pPr indent="0" marL="0">
+            <a:pPr marL="0" indent="0">
               <a:buNone/>
             </a:pPr>
             <a:r>
@@ -7743,16 +7940,34 @@
         </p:nvGraphicFramePr>
         <p:xfrm>
           <a:off x="365760" y="914400"/>
-          <a:ext cx="8412480" cy="3977640"/>
+          <a:ext cx="8686800" cy="3950208"/>
         </p:xfrm>
         <a:graphic>
           <a:graphicData uri="http://schemas.openxmlformats.org/drawingml/2006/table">
             <a:tbl>
               <a:tblPr/>
               <a:tblGrid>
-                <a:gridCol w="3200400"/>
-                <a:gridCol w="2743200"/>
-                <a:gridCol w="2743200"/>
+                <a:gridCol w="3200400">
+                  <a:extLst>
+                    <a:ext uri="{9D8B030D-6E8A-4147-A177-3AD203B41FA5}">
+                      <a16:colId xmlns:a16="http://schemas.microsoft.com/office/drawing/2014/main" val="20000"/>
+                    </a:ext>
+                  </a:extLst>
+                </a:gridCol>
+                <a:gridCol w="2743200">
+                  <a:extLst>
+                    <a:ext uri="{9D8B030D-6E8A-4147-A177-3AD203B41FA5}">
+                      <a16:colId xmlns:a16="http://schemas.microsoft.com/office/drawing/2014/main" val="20001"/>
+                    </a:ext>
+                  </a:extLst>
+                </a:gridCol>
+                <a:gridCol w="2743200">
+                  <a:extLst>
+                    <a:ext uri="{9D8B030D-6E8A-4147-A177-3AD203B41FA5}">
+                      <a16:colId xmlns:a16="http://schemas.microsoft.com/office/drawing/2014/main" val="20002"/>
+                    </a:ext>
+                  </a:extLst>
+                </a:gridCol>
               </a:tblGrid>
               <a:tr h="438912">
                 <a:tc>
@@ -7760,7 +7975,7 @@
                     <a:bodyPr/>
                     <a:lstStyle/>
                     <a:p>
-                      <a:pPr algn="l" indent="0" marL="0">
+                      <a:pPr marL="0" indent="0" algn="l">
                         <a:buNone/>
                       </a:pPr>
                       <a:r>
@@ -7781,7 +7996,7 @@
                       </a:endParaRPr>
                     </a:p>
                   </a:txBody>
-                  <a:tcPr marL="91440" marR="91440" marT="45720" marB="45720">
+                  <a:tcPr>
                     <a:lnL w="6350" cap="flat" cmpd="sng" algn="ctr">
                       <a:solidFill>
                         <a:srgbClr val="E2E8F0"/>
@@ -7828,7 +8043,7 @@
                     <a:bodyPr/>
                     <a:lstStyle/>
                     <a:p>
-                      <a:pPr algn="ctr" indent="0" marL="0">
+                      <a:pPr marL="0" indent="0" algn="ctr">
                         <a:buNone/>
                       </a:pPr>
                       <a:r>
@@ -7849,7 +8064,7 @@
                       </a:endParaRPr>
                     </a:p>
                   </a:txBody>
-                  <a:tcPr marL="91440" marR="91440" marT="45720" marB="45720">
+                  <a:tcPr>
                     <a:lnL w="6350" cap="flat" cmpd="sng" algn="ctr">
                       <a:solidFill>
                         <a:srgbClr val="E2E8F0"/>
@@ -7896,7 +8111,7 @@
                     <a:bodyPr/>
                     <a:lstStyle/>
                     <a:p>
-                      <a:pPr algn="ctr" indent="0" marL="0">
+                      <a:pPr marL="0" indent="0" algn="ctr">
                         <a:buNone/>
                       </a:pPr>
                       <a:r>
@@ -7917,7 +8132,7 @@
                       </a:endParaRPr>
                     </a:p>
                   </a:txBody>
-                  <a:tcPr marL="91440" marR="91440" marT="45720" marB="45720">
+                  <a:tcPr>
                     <a:lnL w="6350" cap="flat" cmpd="sng" algn="ctr">
                       <a:solidFill>
                         <a:srgbClr val="E2E8F0"/>
@@ -7959,6 +8174,11 @@
                     </a:solidFill>
                   </a:tcPr>
                 </a:tc>
+                <a:extLst>
+                  <a:ext uri="{0D108BD9-81ED-4DB2-BD59-A6C34878D82A}">
+                    <a16:rowId xmlns:a16="http://schemas.microsoft.com/office/drawing/2014/main" val="10000"/>
+                  </a:ext>
+                </a:extLst>
               </a:tr>
               <a:tr h="438912">
                 <a:tc>
@@ -7966,7 +8186,7 @@
                     <a:bodyPr/>
                     <a:lstStyle/>
                     <a:p>
-                      <a:pPr indent="0" marL="0">
+                      <a:pPr marL="0" indent="0">
                         <a:buNone/>
                       </a:pPr>
                       <a:r>
@@ -7987,7 +8207,7 @@
                       </a:endParaRPr>
                     </a:p>
                   </a:txBody>
-                  <a:tcPr marL="91440" marR="91440" marT="45720" marB="45720">
+                  <a:tcPr>
                     <a:lnL w="6350" cap="flat" cmpd="sng" algn="ctr">
                       <a:solidFill>
                         <a:srgbClr val="E2E8F0"/>
@@ -8034,7 +8254,7 @@
                     <a:bodyPr/>
                     <a:lstStyle/>
                     <a:p>
-                      <a:pPr algn="ctr" indent="0" marL="0">
+                      <a:pPr marL="0" indent="0" algn="ctr">
                         <a:buNone/>
                       </a:pPr>
                       <a:r>
@@ -8055,7 +8275,7 @@
                       </a:endParaRPr>
                     </a:p>
                   </a:txBody>
-                  <a:tcPr marL="91440" marR="91440" marT="45720" marB="45720">
+                  <a:tcPr>
                     <a:lnL w="6350" cap="flat" cmpd="sng" algn="ctr">
                       <a:solidFill>
                         <a:srgbClr val="E2E8F0"/>
@@ -8102,7 +8322,7 @@
                     <a:bodyPr/>
                     <a:lstStyle/>
                     <a:p>
-                      <a:pPr algn="ctr" indent="0" marL="0">
+                      <a:pPr marL="0" indent="0" algn="ctr">
                         <a:buNone/>
                       </a:pPr>
                       <a:r>
@@ -8123,7 +8343,7 @@
                       </a:endParaRPr>
                     </a:p>
                   </a:txBody>
-                  <a:tcPr marL="91440" marR="91440" marT="45720" marB="45720">
+                  <a:tcPr>
                     <a:lnL w="6350" cap="flat" cmpd="sng" algn="ctr">
                       <a:solidFill>
                         <a:srgbClr val="E2E8F0"/>
@@ -8165,6 +8385,11 @@
                     </a:solidFill>
                   </a:tcPr>
                 </a:tc>
+                <a:extLst>
+                  <a:ext uri="{0D108BD9-81ED-4DB2-BD59-A6C34878D82A}">
+                    <a16:rowId xmlns:a16="http://schemas.microsoft.com/office/drawing/2014/main" val="10001"/>
+                  </a:ext>
+                </a:extLst>
               </a:tr>
               <a:tr h="438912">
                 <a:tc>
@@ -8172,7 +8397,7 @@
                     <a:bodyPr/>
                     <a:lstStyle/>
                     <a:p>
-                      <a:pPr indent="0" marL="0">
+                      <a:pPr marL="0" indent="0">
                         <a:buNone/>
                       </a:pPr>
                       <a:r>
@@ -8193,7 +8418,7 @@
                       </a:endParaRPr>
                     </a:p>
                   </a:txBody>
-                  <a:tcPr marL="91440" marR="91440" marT="45720" marB="45720">
+                  <a:tcPr>
                     <a:lnL w="6350" cap="flat" cmpd="sng" algn="ctr">
                       <a:solidFill>
                         <a:srgbClr val="E2E8F0"/>
@@ -8240,7 +8465,7 @@
                     <a:bodyPr/>
                     <a:lstStyle/>
                     <a:p>
-                      <a:pPr algn="ctr" indent="0" marL="0">
+                      <a:pPr marL="0" indent="0" algn="ctr">
                         <a:buNone/>
                       </a:pPr>
                       <a:r>
@@ -8261,7 +8486,7 @@
                       </a:endParaRPr>
                     </a:p>
                   </a:txBody>
-                  <a:tcPr marL="91440" marR="91440" marT="45720" marB="45720">
+                  <a:tcPr>
                     <a:lnL w="6350" cap="flat" cmpd="sng" algn="ctr">
                       <a:solidFill>
                         <a:srgbClr val="E2E8F0"/>
@@ -8308,7 +8533,7 @@
                     <a:bodyPr/>
                     <a:lstStyle/>
                     <a:p>
-                      <a:pPr algn="ctr" indent="0" marL="0">
+                      <a:pPr marL="0" indent="0" algn="ctr">
                         <a:buNone/>
                       </a:pPr>
                       <a:r>
@@ -8329,7 +8554,7 @@
                       </a:endParaRPr>
                     </a:p>
                   </a:txBody>
-                  <a:tcPr marL="91440" marR="91440" marT="45720" marB="45720">
+                  <a:tcPr>
                     <a:lnL w="6350" cap="flat" cmpd="sng" algn="ctr">
                       <a:solidFill>
                         <a:srgbClr val="E2E8F0"/>
@@ -8371,6 +8596,11 @@
                     </a:solidFill>
                   </a:tcPr>
                 </a:tc>
+                <a:extLst>
+                  <a:ext uri="{0D108BD9-81ED-4DB2-BD59-A6C34878D82A}">
+                    <a16:rowId xmlns:a16="http://schemas.microsoft.com/office/drawing/2014/main" val="10002"/>
+                  </a:ext>
+                </a:extLst>
               </a:tr>
               <a:tr h="438912">
                 <a:tc>
@@ -8378,7 +8608,7 @@
                     <a:bodyPr/>
                     <a:lstStyle/>
                     <a:p>
-                      <a:pPr indent="0" marL="0">
+                      <a:pPr marL="0" indent="0">
                         <a:buNone/>
                       </a:pPr>
                       <a:r>
@@ -8399,7 +8629,7 @@
                       </a:endParaRPr>
                     </a:p>
                   </a:txBody>
-                  <a:tcPr marL="91440" marR="91440" marT="45720" marB="45720">
+                  <a:tcPr>
                     <a:lnL w="6350" cap="flat" cmpd="sng" algn="ctr">
                       <a:solidFill>
                         <a:srgbClr val="E2E8F0"/>
@@ -8446,7 +8676,7 @@
                     <a:bodyPr/>
                     <a:lstStyle/>
                     <a:p>
-                      <a:pPr algn="ctr" indent="0" marL="0">
+                      <a:pPr marL="0" indent="0" algn="ctr">
                         <a:buNone/>
                       </a:pPr>
                       <a:r>
@@ -8467,7 +8697,7 @@
                       </a:endParaRPr>
                     </a:p>
                   </a:txBody>
-                  <a:tcPr marL="91440" marR="91440" marT="45720" marB="45720">
+                  <a:tcPr>
                     <a:lnL w="6350" cap="flat" cmpd="sng" algn="ctr">
                       <a:solidFill>
                         <a:srgbClr val="E2E8F0"/>
@@ -8514,7 +8744,7 @@
                     <a:bodyPr/>
                     <a:lstStyle/>
                     <a:p>
-                      <a:pPr algn="ctr" indent="0" marL="0">
+                      <a:pPr marL="0" indent="0" algn="ctr">
                         <a:buNone/>
                       </a:pPr>
                       <a:r>
@@ -8535,7 +8765,7 @@
                       </a:endParaRPr>
                     </a:p>
                   </a:txBody>
-                  <a:tcPr marL="91440" marR="91440" marT="45720" marB="45720">
+                  <a:tcPr>
                     <a:lnL w="6350" cap="flat" cmpd="sng" algn="ctr">
                       <a:solidFill>
                         <a:srgbClr val="E2E8F0"/>
@@ -8577,6 +8807,11 @@
                     </a:solidFill>
                   </a:tcPr>
                 </a:tc>
+                <a:extLst>
+                  <a:ext uri="{0D108BD9-81ED-4DB2-BD59-A6C34878D82A}">
+                    <a16:rowId xmlns:a16="http://schemas.microsoft.com/office/drawing/2014/main" val="10003"/>
+                  </a:ext>
+                </a:extLst>
               </a:tr>
               <a:tr h="438912">
                 <a:tc>
@@ -8584,7 +8819,7 @@
                     <a:bodyPr/>
                     <a:lstStyle/>
                     <a:p>
-                      <a:pPr indent="0" marL="0">
+                      <a:pPr marL="0" indent="0">
                         <a:buNone/>
                       </a:pPr>
                       <a:r>
@@ -8605,7 +8840,7 @@
                       </a:endParaRPr>
                     </a:p>
                   </a:txBody>
-                  <a:tcPr marL="91440" marR="91440" marT="45720" marB="45720">
+                  <a:tcPr>
                     <a:lnL w="6350" cap="flat" cmpd="sng" algn="ctr">
                       <a:solidFill>
                         <a:srgbClr val="E2E8F0"/>
@@ -8652,7 +8887,7 @@
                     <a:bodyPr/>
                     <a:lstStyle/>
                     <a:p>
-                      <a:pPr algn="ctr" indent="0" marL="0">
+                      <a:pPr marL="0" indent="0" algn="ctr">
                         <a:buNone/>
                       </a:pPr>
                       <a:r>
@@ -8673,7 +8908,7 @@
                       </a:endParaRPr>
                     </a:p>
                   </a:txBody>
-                  <a:tcPr marL="91440" marR="91440" marT="45720" marB="45720">
+                  <a:tcPr>
                     <a:lnL w="6350" cap="flat" cmpd="sng" algn="ctr">
                       <a:solidFill>
                         <a:srgbClr val="E2E8F0"/>
@@ -8720,7 +8955,7 @@
                     <a:bodyPr/>
                     <a:lstStyle/>
                     <a:p>
-                      <a:pPr algn="ctr" indent="0" marL="0">
+                      <a:pPr marL="0" indent="0" algn="ctr">
                         <a:buNone/>
                       </a:pPr>
                       <a:r>
@@ -8741,7 +8976,7 @@
                       </a:endParaRPr>
                     </a:p>
                   </a:txBody>
-                  <a:tcPr marL="91440" marR="91440" marT="45720" marB="45720">
+                  <a:tcPr>
                     <a:lnL w="6350" cap="flat" cmpd="sng" algn="ctr">
                       <a:solidFill>
                         <a:srgbClr val="E2E8F0"/>
@@ -8783,6 +9018,11 @@
                     </a:solidFill>
                   </a:tcPr>
                 </a:tc>
+                <a:extLst>
+                  <a:ext uri="{0D108BD9-81ED-4DB2-BD59-A6C34878D82A}">
+                    <a16:rowId xmlns:a16="http://schemas.microsoft.com/office/drawing/2014/main" val="10004"/>
+                  </a:ext>
+                </a:extLst>
               </a:tr>
               <a:tr h="438912">
                 <a:tc>
@@ -8790,7 +9030,7 @@
                     <a:bodyPr/>
                     <a:lstStyle/>
                     <a:p>
-                      <a:pPr indent="0" marL="0">
+                      <a:pPr marL="0" indent="0">
                         <a:buNone/>
                       </a:pPr>
                       <a:r>
@@ -8811,7 +9051,7 @@
                       </a:endParaRPr>
                     </a:p>
                   </a:txBody>
-                  <a:tcPr marL="91440" marR="91440" marT="45720" marB="45720">
+                  <a:tcPr>
                     <a:lnL w="6350" cap="flat" cmpd="sng" algn="ctr">
                       <a:solidFill>
                         <a:srgbClr val="E2E8F0"/>
@@ -8858,7 +9098,7 @@
                     <a:bodyPr/>
                     <a:lstStyle/>
                     <a:p>
-                      <a:pPr algn="ctr" indent="0" marL="0">
+                      <a:pPr marL="0" indent="0" algn="ctr">
                         <a:buNone/>
                       </a:pPr>
                       <a:r>
@@ -8879,7 +9119,7 @@
                       </a:endParaRPr>
                     </a:p>
                   </a:txBody>
-                  <a:tcPr marL="91440" marR="91440" marT="45720" marB="45720">
+                  <a:tcPr>
                     <a:lnL w="6350" cap="flat" cmpd="sng" algn="ctr">
                       <a:solidFill>
                         <a:srgbClr val="E2E8F0"/>
@@ -8926,7 +9166,7 @@
                     <a:bodyPr/>
                     <a:lstStyle/>
                     <a:p>
-                      <a:pPr algn="ctr" indent="0" marL="0">
+                      <a:pPr marL="0" indent="0" algn="ctr">
                         <a:buNone/>
                       </a:pPr>
                       <a:r>
@@ -8947,7 +9187,7 @@
                       </a:endParaRPr>
                     </a:p>
                   </a:txBody>
-                  <a:tcPr marL="91440" marR="91440" marT="45720" marB="45720">
+                  <a:tcPr>
                     <a:lnL w="6350" cap="flat" cmpd="sng" algn="ctr">
                       <a:solidFill>
                         <a:srgbClr val="E2E8F0"/>
@@ -8989,6 +9229,11 @@
                     </a:solidFill>
                   </a:tcPr>
                 </a:tc>
+                <a:extLst>
+                  <a:ext uri="{0D108BD9-81ED-4DB2-BD59-A6C34878D82A}">
+                    <a16:rowId xmlns:a16="http://schemas.microsoft.com/office/drawing/2014/main" val="10005"/>
+                  </a:ext>
+                </a:extLst>
               </a:tr>
               <a:tr h="438912">
                 <a:tc>
@@ -8996,7 +9241,7 @@
                     <a:bodyPr/>
                     <a:lstStyle/>
                     <a:p>
-                      <a:pPr indent="0" marL="0">
+                      <a:pPr marL="0" indent="0">
                         <a:buNone/>
                       </a:pPr>
                       <a:r>
@@ -9017,7 +9262,7 @@
                       </a:endParaRPr>
                     </a:p>
                   </a:txBody>
-                  <a:tcPr marL="91440" marR="91440" marT="45720" marB="45720">
+                  <a:tcPr>
                     <a:lnL w="6350" cap="flat" cmpd="sng" algn="ctr">
                       <a:solidFill>
                         <a:srgbClr val="E2E8F0"/>
@@ -9064,7 +9309,7 @@
                     <a:bodyPr/>
                     <a:lstStyle/>
                     <a:p>
-                      <a:pPr algn="ctr" indent="0" marL="0">
+                      <a:pPr marL="0" indent="0" algn="ctr">
                         <a:buNone/>
                       </a:pPr>
                       <a:r>
@@ -9085,7 +9330,7 @@
                       </a:endParaRPr>
                     </a:p>
                   </a:txBody>
-                  <a:tcPr marL="91440" marR="91440" marT="45720" marB="45720">
+                  <a:tcPr>
                     <a:lnL w="6350" cap="flat" cmpd="sng" algn="ctr">
                       <a:solidFill>
                         <a:srgbClr val="E2E8F0"/>
@@ -9132,7 +9377,7 @@
                     <a:bodyPr/>
                     <a:lstStyle/>
                     <a:p>
-                      <a:pPr algn="ctr" indent="0" marL="0">
+                      <a:pPr marL="0" indent="0" algn="ctr">
                         <a:buNone/>
                       </a:pPr>
                       <a:r>
@@ -9153,7 +9398,7 @@
                       </a:endParaRPr>
                     </a:p>
                   </a:txBody>
-                  <a:tcPr marL="91440" marR="91440" marT="45720" marB="45720">
+                  <a:tcPr>
                     <a:lnL w="6350" cap="flat" cmpd="sng" algn="ctr">
                       <a:solidFill>
                         <a:srgbClr val="E2E8F0"/>
@@ -9195,6 +9440,11 @@
                     </a:solidFill>
                   </a:tcPr>
                 </a:tc>
+                <a:extLst>
+                  <a:ext uri="{0D108BD9-81ED-4DB2-BD59-A6C34878D82A}">
+                    <a16:rowId xmlns:a16="http://schemas.microsoft.com/office/drawing/2014/main" val="10006"/>
+                  </a:ext>
+                </a:extLst>
               </a:tr>
               <a:tr h="438912">
                 <a:tc>
@@ -9202,7 +9452,7 @@
                     <a:bodyPr/>
                     <a:lstStyle/>
                     <a:p>
-                      <a:pPr indent="0" marL="0">
+                      <a:pPr marL="0" indent="0">
                         <a:buNone/>
                       </a:pPr>
                       <a:r>
@@ -9223,7 +9473,7 @@
                       </a:endParaRPr>
                     </a:p>
                   </a:txBody>
-                  <a:tcPr marL="91440" marR="91440" marT="45720" marB="45720">
+                  <a:tcPr>
                     <a:lnL w="6350" cap="flat" cmpd="sng" algn="ctr">
                       <a:solidFill>
                         <a:srgbClr val="E2E8F0"/>
@@ -9270,7 +9520,7 @@
                     <a:bodyPr/>
                     <a:lstStyle/>
                     <a:p>
-                      <a:pPr algn="ctr" indent="0" marL="0">
+                      <a:pPr marL="0" indent="0" algn="ctr">
                         <a:buNone/>
                       </a:pPr>
                       <a:r>
@@ -9291,7 +9541,7 @@
                       </a:endParaRPr>
                     </a:p>
                   </a:txBody>
-                  <a:tcPr marL="91440" marR="91440" marT="45720" marB="45720">
+                  <a:tcPr>
                     <a:lnL w="6350" cap="flat" cmpd="sng" algn="ctr">
                       <a:solidFill>
                         <a:srgbClr val="E2E8F0"/>
@@ -9338,7 +9588,7 @@
                     <a:bodyPr/>
                     <a:lstStyle/>
                     <a:p>
-                      <a:pPr algn="ctr" indent="0" marL="0">
+                      <a:pPr marL="0" indent="0" algn="ctr">
                         <a:buNone/>
                       </a:pPr>
                       <a:r>
@@ -9359,7 +9609,7 @@
                       </a:endParaRPr>
                     </a:p>
                   </a:txBody>
-                  <a:tcPr marL="91440" marR="91440" marT="45720" marB="45720">
+                  <a:tcPr>
                     <a:lnL w="6350" cap="flat" cmpd="sng" algn="ctr">
                       <a:solidFill>
                         <a:srgbClr val="E2E8F0"/>
@@ -9401,6 +9651,11 @@
                     </a:solidFill>
                   </a:tcPr>
                 </a:tc>
+                <a:extLst>
+                  <a:ext uri="{0D108BD9-81ED-4DB2-BD59-A6C34878D82A}">
+                    <a16:rowId xmlns:a16="http://schemas.microsoft.com/office/drawing/2014/main" val="10007"/>
+                  </a:ext>
+                </a:extLst>
               </a:tr>
               <a:tr h="438912">
                 <a:tc>
@@ -9408,7 +9663,7 @@
                     <a:bodyPr/>
                     <a:lstStyle/>
                     <a:p>
-                      <a:pPr indent="0" marL="0">
+                      <a:pPr marL="0" indent="0">
                         <a:buNone/>
                       </a:pPr>
                       <a:r>
@@ -9429,7 +9684,7 @@
                       </a:endParaRPr>
                     </a:p>
                   </a:txBody>
-                  <a:tcPr marL="91440" marR="91440" marT="45720" marB="45720">
+                  <a:tcPr>
                     <a:lnL w="6350" cap="flat" cmpd="sng" algn="ctr">
                       <a:solidFill>
                         <a:srgbClr val="E2E8F0"/>
@@ -9476,7 +9731,7 @@
                     <a:bodyPr/>
                     <a:lstStyle/>
                     <a:p>
-                      <a:pPr algn="ctr" indent="0" marL="0">
+                      <a:pPr marL="0" indent="0" algn="ctr">
                         <a:buNone/>
                       </a:pPr>
                       <a:r>
@@ -9497,7 +9752,7 @@
                       </a:endParaRPr>
                     </a:p>
                   </a:txBody>
-                  <a:tcPr marL="91440" marR="91440" marT="45720" marB="45720">
+                  <a:tcPr>
                     <a:lnL w="6350" cap="flat" cmpd="sng" algn="ctr">
                       <a:solidFill>
                         <a:srgbClr val="E2E8F0"/>
@@ -9544,7 +9799,7 @@
                     <a:bodyPr/>
                     <a:lstStyle/>
                     <a:p>
-                      <a:pPr algn="ctr" indent="0" marL="0">
+                      <a:pPr marL="0" indent="0" algn="ctr">
                         <a:buNone/>
                       </a:pPr>
                       <a:r>
@@ -9565,7 +9820,7 @@
                       </a:endParaRPr>
                     </a:p>
                   </a:txBody>
-                  <a:tcPr marL="91440" marR="91440" marT="45720" marB="45720">
+                  <a:tcPr>
                     <a:lnL w="6350" cap="flat" cmpd="sng" algn="ctr">
                       <a:solidFill>
                         <a:srgbClr val="E2E8F0"/>
@@ -9607,6 +9862,11 @@
                     </a:solidFill>
                   </a:tcPr>
                 </a:tc>
+                <a:extLst>
+                  <a:ext uri="{0D108BD9-81ED-4DB2-BD59-A6C34878D82A}">
+                    <a16:rowId xmlns:a16="http://schemas.microsoft.com/office/drawing/2014/main" val="10008"/>
+                  </a:ext>
+                </a:extLst>
               </a:tr>
             </a:tbl>
           </a:graphicData>
@@ -9628,6 +9888,7 @@
         <a:solidFill>
           <a:srgbClr val="F8FAFC"/>
         </a:solidFill>
+        <a:effectLst/>
       </p:bgPr>
     </p:bg>
     <p:spTree>
@@ -9663,6 +9924,13 @@
           </a:solidFill>
           <a:ln/>
         </p:spPr>
+        <p:txBody>
+          <a:bodyPr/>
+          <a:lstStyle/>
+          <a:p>
+            <a:endParaRPr lang="es-MX"/>
+          </a:p>
+        </p:txBody>
       </p:sp>
       <p:sp>
         <p:nvSpPr>
@@ -9685,7 +9953,7 @@
           <a:bodyPr wrap="square" rtlCol="0" anchor="ctr"/>
           <a:lstStyle/>
           <a:p>
-            <a:pPr indent="0" marL="0">
+            <a:pPr marL="0" indent="0">
               <a:buNone/>
             </a:pPr>
             <a:r>
@@ -9719,16 +9987,34 @@
         </p:nvGraphicFramePr>
         <p:xfrm>
           <a:off x="365760" y="914400"/>
-          <a:ext cx="5120640" cy="3931920"/>
+          <a:ext cx="5120640" cy="3657600"/>
         </p:xfrm>
         <a:graphic>
           <a:graphicData uri="http://schemas.openxmlformats.org/drawingml/2006/table">
             <a:tbl>
               <a:tblPr/>
               <a:tblGrid>
-                <a:gridCol w="2651760"/>
-                <a:gridCol w="1234440"/>
-                <a:gridCol w="1234440"/>
+                <a:gridCol w="2651760">
+                  <a:extLst>
+                    <a:ext uri="{9D8B030D-6E8A-4147-A177-3AD203B41FA5}">
+                      <a16:colId xmlns:a16="http://schemas.microsoft.com/office/drawing/2014/main" val="20000"/>
+                    </a:ext>
+                  </a:extLst>
+                </a:gridCol>
+                <a:gridCol w="1234440">
+                  <a:extLst>
+                    <a:ext uri="{9D8B030D-6E8A-4147-A177-3AD203B41FA5}">
+                      <a16:colId xmlns:a16="http://schemas.microsoft.com/office/drawing/2014/main" val="20001"/>
+                    </a:ext>
+                  </a:extLst>
+                </a:gridCol>
+                <a:gridCol w="1234440">
+                  <a:extLst>
+                    <a:ext uri="{9D8B030D-6E8A-4147-A177-3AD203B41FA5}">
+                      <a16:colId xmlns:a16="http://schemas.microsoft.com/office/drawing/2014/main" val="20002"/>
+                    </a:ext>
+                  </a:extLst>
+                </a:gridCol>
               </a:tblGrid>
               <a:tr h="365760">
                 <a:tc>
@@ -9736,7 +10022,7 @@
                     <a:bodyPr/>
                     <a:lstStyle/>
                     <a:p>
-                      <a:pPr indent="0" marL="0">
+                      <a:pPr marL="0" indent="0">
                         <a:buNone/>
                       </a:pPr>
                       <a:r>
@@ -9757,7 +10043,7 @@
                       </a:endParaRPr>
                     </a:p>
                   </a:txBody>
-                  <a:tcPr marL="91440" marR="91440" marT="45720" marB="45720">
+                  <a:tcPr>
                     <a:lnL w="6350" cap="flat" cmpd="sng" algn="ctr">
                       <a:solidFill>
                         <a:srgbClr val="E2E8F0"/>
@@ -9804,7 +10090,7 @@
                     <a:bodyPr/>
                     <a:lstStyle/>
                     <a:p>
-                      <a:pPr algn="ctr" indent="0" marL="0">
+                      <a:pPr marL="0" indent="0" algn="ctr">
                         <a:buNone/>
                       </a:pPr>
                       <a:r>
@@ -9825,7 +10111,7 @@
                       </a:endParaRPr>
                     </a:p>
                   </a:txBody>
-                  <a:tcPr marL="91440" marR="91440" marT="45720" marB="45720">
+                  <a:tcPr>
                     <a:lnL w="6350" cap="flat" cmpd="sng" algn="ctr">
                       <a:solidFill>
                         <a:srgbClr val="E2E8F0"/>
@@ -9872,7 +10158,7 @@
                     <a:bodyPr/>
                     <a:lstStyle/>
                     <a:p>
-                      <a:pPr algn="ctr" indent="0" marL="0">
+                      <a:pPr marL="0" indent="0" algn="ctr">
                         <a:buNone/>
                       </a:pPr>
                       <a:r>
@@ -9893,7 +10179,7 @@
                       </a:endParaRPr>
                     </a:p>
                   </a:txBody>
-                  <a:tcPr marL="91440" marR="91440" marT="45720" marB="45720">
+                  <a:tcPr>
                     <a:lnL w="6350" cap="flat" cmpd="sng" algn="ctr">
                       <a:solidFill>
                         <a:srgbClr val="E2E8F0"/>
@@ -9935,6 +10221,11 @@
                     </a:solidFill>
                   </a:tcPr>
                 </a:tc>
+                <a:extLst>
+                  <a:ext uri="{0D108BD9-81ED-4DB2-BD59-A6C34878D82A}">
+                    <a16:rowId xmlns:a16="http://schemas.microsoft.com/office/drawing/2014/main" val="10000"/>
+                  </a:ext>
+                </a:extLst>
               </a:tr>
               <a:tr h="365760">
                 <a:tc>
@@ -9942,7 +10233,7 @@
                     <a:bodyPr/>
                     <a:lstStyle/>
                     <a:p>
-                      <a:pPr indent="0" marL="0">
+                      <a:pPr marL="0" indent="0">
                         <a:buNone/>
                       </a:pPr>
                       <a:r>
@@ -9963,7 +10254,7 @@
                       </a:endParaRPr>
                     </a:p>
                   </a:txBody>
-                  <a:tcPr marL="91440" marR="91440" marT="45720" marB="45720">
+                  <a:tcPr>
                     <a:lnL w="6350" cap="flat" cmpd="sng" algn="ctr">
                       <a:solidFill>
                         <a:srgbClr val="E2E8F0"/>
@@ -10010,7 +10301,7 @@
                     <a:bodyPr/>
                     <a:lstStyle/>
                     <a:p>
-                      <a:pPr algn="ctr" indent="0" marL="0">
+                      <a:pPr marL="0" indent="0" algn="ctr">
                         <a:buNone/>
                       </a:pPr>
                       <a:r>
@@ -10031,7 +10322,7 @@
                       </a:endParaRPr>
                     </a:p>
                   </a:txBody>
-                  <a:tcPr marL="91440" marR="91440" marT="45720" marB="45720">
+                  <a:tcPr>
                     <a:lnL w="6350" cap="flat" cmpd="sng" algn="ctr">
                       <a:solidFill>
                         <a:srgbClr val="E2E8F0"/>
@@ -10078,7 +10369,7 @@
                     <a:bodyPr/>
                     <a:lstStyle/>
                     <a:p>
-                      <a:pPr algn="ctr" indent="0" marL="0">
+                      <a:pPr marL="0" indent="0" algn="ctr">
                         <a:buNone/>
                       </a:pPr>
                       <a:r>
@@ -10099,7 +10390,7 @@
                       </a:endParaRPr>
                     </a:p>
                   </a:txBody>
-                  <a:tcPr marL="91440" marR="91440" marT="45720" marB="45720">
+                  <a:tcPr>
                     <a:lnL w="6350" cap="flat" cmpd="sng" algn="ctr">
                       <a:solidFill>
                         <a:srgbClr val="E2E8F0"/>
@@ -10141,6 +10432,11 @@
                     </a:solidFill>
                   </a:tcPr>
                 </a:tc>
+                <a:extLst>
+                  <a:ext uri="{0D108BD9-81ED-4DB2-BD59-A6C34878D82A}">
+                    <a16:rowId xmlns:a16="http://schemas.microsoft.com/office/drawing/2014/main" val="10001"/>
+                  </a:ext>
+                </a:extLst>
               </a:tr>
               <a:tr h="365760">
                 <a:tc>
@@ -10148,7 +10444,7 @@
                     <a:bodyPr/>
                     <a:lstStyle/>
                     <a:p>
-                      <a:pPr indent="0" marL="0">
+                      <a:pPr marL="0" indent="0">
                         <a:buNone/>
                       </a:pPr>
                       <a:r>
@@ -10169,7 +10465,7 @@
                       </a:endParaRPr>
                     </a:p>
                   </a:txBody>
-                  <a:tcPr marL="91440" marR="91440" marT="45720" marB="45720">
+                  <a:tcPr>
                     <a:lnL w="6350" cap="flat" cmpd="sng" algn="ctr">
                       <a:solidFill>
                         <a:srgbClr val="E2E8F0"/>
@@ -10216,7 +10512,7 @@
                     <a:bodyPr/>
                     <a:lstStyle/>
                     <a:p>
-                      <a:pPr algn="ctr" indent="0" marL="0">
+                      <a:pPr marL="0" indent="0" algn="ctr">
                         <a:buNone/>
                       </a:pPr>
                       <a:r>
@@ -10237,7 +10533,7 @@
                       </a:endParaRPr>
                     </a:p>
                   </a:txBody>
-                  <a:tcPr marL="91440" marR="91440" marT="45720" marB="45720">
+                  <a:tcPr>
                     <a:lnL w="6350" cap="flat" cmpd="sng" algn="ctr">
                       <a:solidFill>
                         <a:srgbClr val="E2E8F0"/>
@@ -10284,7 +10580,7 @@
                     <a:bodyPr/>
                     <a:lstStyle/>
                     <a:p>
-                      <a:pPr algn="ctr" indent="0" marL="0">
+                      <a:pPr marL="0" indent="0" algn="ctr">
                         <a:buNone/>
                       </a:pPr>
                       <a:r>
@@ -10305,7 +10601,7 @@
                       </a:endParaRPr>
                     </a:p>
                   </a:txBody>
-                  <a:tcPr marL="91440" marR="91440" marT="45720" marB="45720">
+                  <a:tcPr>
                     <a:lnL w="6350" cap="flat" cmpd="sng" algn="ctr">
                       <a:solidFill>
                         <a:srgbClr val="E2E8F0"/>
@@ -10347,6 +10643,11 @@
                     </a:solidFill>
                   </a:tcPr>
                 </a:tc>
+                <a:extLst>
+                  <a:ext uri="{0D108BD9-81ED-4DB2-BD59-A6C34878D82A}">
+                    <a16:rowId xmlns:a16="http://schemas.microsoft.com/office/drawing/2014/main" val="10002"/>
+                  </a:ext>
+                </a:extLst>
               </a:tr>
               <a:tr h="365760">
                 <a:tc>
@@ -10354,7 +10655,7 @@
                     <a:bodyPr/>
                     <a:lstStyle/>
                     <a:p>
-                      <a:pPr indent="0" marL="0">
+                      <a:pPr marL="0" indent="0">
                         <a:buNone/>
                       </a:pPr>
                       <a:r>
@@ -10375,7 +10676,7 @@
                       </a:endParaRPr>
                     </a:p>
                   </a:txBody>
-                  <a:tcPr marL="91440" marR="91440" marT="45720" marB="45720">
+                  <a:tcPr>
                     <a:lnL w="6350" cap="flat" cmpd="sng" algn="ctr">
                       <a:solidFill>
                         <a:srgbClr val="E2E8F0"/>
@@ -10422,7 +10723,7 @@
                     <a:bodyPr/>
                     <a:lstStyle/>
                     <a:p>
-                      <a:pPr algn="ctr" indent="0" marL="0">
+                      <a:pPr marL="0" indent="0" algn="ctr">
                         <a:buNone/>
                       </a:pPr>
                       <a:r>
@@ -10443,7 +10744,7 @@
                       </a:endParaRPr>
                     </a:p>
                   </a:txBody>
-                  <a:tcPr marL="91440" marR="91440" marT="45720" marB="45720">
+                  <a:tcPr>
                     <a:lnL w="6350" cap="flat" cmpd="sng" algn="ctr">
                       <a:solidFill>
                         <a:srgbClr val="E2E8F0"/>
@@ -10490,7 +10791,7 @@
                     <a:bodyPr/>
                     <a:lstStyle/>
                     <a:p>
-                      <a:pPr algn="ctr" indent="0" marL="0">
+                      <a:pPr marL="0" indent="0" algn="ctr">
                         <a:buNone/>
                       </a:pPr>
                       <a:r>
@@ -10511,7 +10812,7 @@
                       </a:endParaRPr>
                     </a:p>
                   </a:txBody>
-                  <a:tcPr marL="91440" marR="91440" marT="45720" marB="45720">
+                  <a:tcPr>
                     <a:lnL w="6350" cap="flat" cmpd="sng" algn="ctr">
                       <a:solidFill>
                         <a:srgbClr val="E2E8F0"/>
@@ -10553,6 +10854,11 @@
                     </a:solidFill>
                   </a:tcPr>
                 </a:tc>
+                <a:extLst>
+                  <a:ext uri="{0D108BD9-81ED-4DB2-BD59-A6C34878D82A}">
+                    <a16:rowId xmlns:a16="http://schemas.microsoft.com/office/drawing/2014/main" val="10003"/>
+                  </a:ext>
+                </a:extLst>
               </a:tr>
               <a:tr h="365760">
                 <a:tc>
@@ -10560,7 +10866,7 @@
                     <a:bodyPr/>
                     <a:lstStyle/>
                     <a:p>
-                      <a:pPr indent="0" marL="0">
+                      <a:pPr marL="0" indent="0">
                         <a:buNone/>
                       </a:pPr>
                       <a:r>
@@ -10581,7 +10887,7 @@
                       </a:endParaRPr>
                     </a:p>
                   </a:txBody>
-                  <a:tcPr marL="91440" marR="91440" marT="45720" marB="45720">
+                  <a:tcPr>
                     <a:lnL w="6350" cap="flat" cmpd="sng" algn="ctr">
                       <a:solidFill>
                         <a:srgbClr val="E2E8F0"/>
@@ -10628,7 +10934,7 @@
                     <a:bodyPr/>
                     <a:lstStyle/>
                     <a:p>
-                      <a:pPr algn="ctr" indent="0" marL="0">
+                      <a:pPr marL="0" indent="0" algn="ctr">
                         <a:buNone/>
                       </a:pPr>
                       <a:r>
@@ -10649,7 +10955,7 @@
                       </a:endParaRPr>
                     </a:p>
                   </a:txBody>
-                  <a:tcPr marL="91440" marR="91440" marT="45720" marB="45720">
+                  <a:tcPr>
                     <a:lnL w="6350" cap="flat" cmpd="sng" algn="ctr">
                       <a:solidFill>
                         <a:srgbClr val="E2E8F0"/>
@@ -10696,7 +11002,7 @@
                     <a:bodyPr/>
                     <a:lstStyle/>
                     <a:p>
-                      <a:pPr algn="ctr" indent="0" marL="0">
+                      <a:pPr marL="0" indent="0" algn="ctr">
                         <a:buNone/>
                       </a:pPr>
                       <a:r>
@@ -10717,7 +11023,7 @@
                       </a:endParaRPr>
                     </a:p>
                   </a:txBody>
-                  <a:tcPr marL="91440" marR="91440" marT="45720" marB="45720">
+                  <a:tcPr>
                     <a:lnL w="6350" cap="flat" cmpd="sng" algn="ctr">
                       <a:solidFill>
                         <a:srgbClr val="E2E8F0"/>
@@ -10759,6 +11065,11 @@
                     </a:solidFill>
                   </a:tcPr>
                 </a:tc>
+                <a:extLst>
+                  <a:ext uri="{0D108BD9-81ED-4DB2-BD59-A6C34878D82A}">
+                    <a16:rowId xmlns:a16="http://schemas.microsoft.com/office/drawing/2014/main" val="10004"/>
+                  </a:ext>
+                </a:extLst>
               </a:tr>
               <a:tr h="365760">
                 <a:tc>
@@ -10766,7 +11077,7 @@
                     <a:bodyPr/>
                     <a:lstStyle/>
                     <a:p>
-                      <a:pPr indent="0" marL="0">
+                      <a:pPr marL="0" indent="0">
                         <a:buNone/>
                       </a:pPr>
                       <a:r>
@@ -10787,7 +11098,7 @@
                       </a:endParaRPr>
                     </a:p>
                   </a:txBody>
-                  <a:tcPr marL="91440" marR="91440" marT="45720" marB="45720">
+                  <a:tcPr>
                     <a:lnL w="6350" cap="flat" cmpd="sng" algn="ctr">
                       <a:solidFill>
                         <a:srgbClr val="E2E8F0"/>
@@ -10834,7 +11145,7 @@
                     <a:bodyPr/>
                     <a:lstStyle/>
                     <a:p>
-                      <a:pPr algn="ctr" indent="0" marL="0">
+                      <a:pPr marL="0" indent="0" algn="ctr">
                         <a:buNone/>
                       </a:pPr>
                       <a:r>
@@ -10855,7 +11166,7 @@
                       </a:endParaRPr>
                     </a:p>
                   </a:txBody>
-                  <a:tcPr marL="91440" marR="91440" marT="45720" marB="45720">
+                  <a:tcPr>
                     <a:lnL w="6350" cap="flat" cmpd="sng" algn="ctr">
                       <a:solidFill>
                         <a:srgbClr val="E2E8F0"/>
@@ -10902,7 +11213,7 @@
                     <a:bodyPr/>
                     <a:lstStyle/>
                     <a:p>
-                      <a:pPr algn="ctr" indent="0" marL="0">
+                      <a:pPr marL="0" indent="0" algn="ctr">
                         <a:buNone/>
                       </a:pPr>
                       <a:r>
@@ -10923,7 +11234,7 @@
                       </a:endParaRPr>
                     </a:p>
                   </a:txBody>
-                  <a:tcPr marL="91440" marR="91440" marT="45720" marB="45720">
+                  <a:tcPr>
                     <a:lnL w="6350" cap="flat" cmpd="sng" algn="ctr">
                       <a:solidFill>
                         <a:srgbClr val="E2E8F0"/>
@@ -10965,6 +11276,11 @@
                     </a:solidFill>
                   </a:tcPr>
                 </a:tc>
+                <a:extLst>
+                  <a:ext uri="{0D108BD9-81ED-4DB2-BD59-A6C34878D82A}">
+                    <a16:rowId xmlns:a16="http://schemas.microsoft.com/office/drawing/2014/main" val="10005"/>
+                  </a:ext>
+                </a:extLst>
               </a:tr>
               <a:tr h="365760">
                 <a:tc>
@@ -10972,7 +11288,7 @@
                     <a:bodyPr/>
                     <a:lstStyle/>
                     <a:p>
-                      <a:pPr indent="0" marL="0">
+                      <a:pPr marL="0" indent="0">
                         <a:buNone/>
                       </a:pPr>
                       <a:r>
@@ -10993,7 +11309,7 @@
                       </a:endParaRPr>
                     </a:p>
                   </a:txBody>
-                  <a:tcPr marL="91440" marR="91440" marT="45720" marB="45720">
+                  <a:tcPr>
                     <a:lnL w="6350" cap="flat" cmpd="sng" algn="ctr">
                       <a:solidFill>
                         <a:srgbClr val="E2E8F0"/>
@@ -11040,7 +11356,7 @@
                     <a:bodyPr/>
                     <a:lstStyle/>
                     <a:p>
-                      <a:pPr algn="ctr" indent="0" marL="0">
+                      <a:pPr marL="0" indent="0" algn="ctr">
                         <a:buNone/>
                       </a:pPr>
                       <a:r>
@@ -11061,7 +11377,7 @@
                       </a:endParaRPr>
                     </a:p>
                   </a:txBody>
-                  <a:tcPr marL="91440" marR="91440" marT="45720" marB="45720">
+                  <a:tcPr>
                     <a:lnL w="6350" cap="flat" cmpd="sng" algn="ctr">
                       <a:solidFill>
                         <a:srgbClr val="E2E8F0"/>
@@ -11108,7 +11424,7 @@
                     <a:bodyPr/>
                     <a:lstStyle/>
                     <a:p>
-                      <a:pPr algn="ctr" indent="0" marL="0">
+                      <a:pPr marL="0" indent="0" algn="ctr">
                         <a:buNone/>
                       </a:pPr>
                       <a:r>
@@ -11129,7 +11445,7 @@
                       </a:endParaRPr>
                     </a:p>
                   </a:txBody>
-                  <a:tcPr marL="91440" marR="91440" marT="45720" marB="45720">
+                  <a:tcPr>
                     <a:lnL w="6350" cap="flat" cmpd="sng" algn="ctr">
                       <a:solidFill>
                         <a:srgbClr val="E2E8F0"/>
@@ -11171,6 +11487,11 @@
                     </a:solidFill>
                   </a:tcPr>
                 </a:tc>
+                <a:extLst>
+                  <a:ext uri="{0D108BD9-81ED-4DB2-BD59-A6C34878D82A}">
+                    <a16:rowId xmlns:a16="http://schemas.microsoft.com/office/drawing/2014/main" val="10006"/>
+                  </a:ext>
+                </a:extLst>
               </a:tr>
               <a:tr h="365760">
                 <a:tc>
@@ -11178,7 +11499,7 @@
                     <a:bodyPr/>
                     <a:lstStyle/>
                     <a:p>
-                      <a:pPr indent="0" marL="0">
+                      <a:pPr marL="0" indent="0">
                         <a:buNone/>
                       </a:pPr>
                       <a:r>
@@ -11199,7 +11520,7 @@
                       </a:endParaRPr>
                     </a:p>
                   </a:txBody>
-                  <a:tcPr marL="91440" marR="91440" marT="45720" marB="45720">
+                  <a:tcPr>
                     <a:lnL w="6350" cap="flat" cmpd="sng" algn="ctr">
                       <a:solidFill>
                         <a:srgbClr val="E2E8F0"/>
@@ -11246,7 +11567,7 @@
                     <a:bodyPr/>
                     <a:lstStyle/>
                     <a:p>
-                      <a:pPr algn="ctr" indent="0" marL="0">
+                      <a:pPr marL="0" indent="0" algn="ctr">
                         <a:buNone/>
                       </a:pPr>
                       <a:r>
@@ -11267,7 +11588,7 @@
                       </a:endParaRPr>
                     </a:p>
                   </a:txBody>
-                  <a:tcPr marL="91440" marR="91440" marT="45720" marB="45720">
+                  <a:tcPr>
                     <a:lnL w="6350" cap="flat" cmpd="sng" algn="ctr">
                       <a:solidFill>
                         <a:srgbClr val="E2E8F0"/>
@@ -11314,7 +11635,7 @@
                     <a:bodyPr/>
                     <a:lstStyle/>
                     <a:p>
-                      <a:pPr algn="ctr" indent="0" marL="0">
+                      <a:pPr marL="0" indent="0" algn="ctr">
                         <a:buNone/>
                       </a:pPr>
                       <a:r>
@@ -11335,7 +11656,7 @@
                       </a:endParaRPr>
                     </a:p>
                   </a:txBody>
-                  <a:tcPr marL="91440" marR="91440" marT="45720" marB="45720">
+                  <a:tcPr>
                     <a:lnL w="6350" cap="flat" cmpd="sng" algn="ctr">
                       <a:solidFill>
                         <a:srgbClr val="E2E8F0"/>
@@ -11377,6 +11698,11 @@
                     </a:solidFill>
                   </a:tcPr>
                 </a:tc>
+                <a:extLst>
+                  <a:ext uri="{0D108BD9-81ED-4DB2-BD59-A6C34878D82A}">
+                    <a16:rowId xmlns:a16="http://schemas.microsoft.com/office/drawing/2014/main" val="10007"/>
+                  </a:ext>
+                </a:extLst>
               </a:tr>
               <a:tr h="365760">
                 <a:tc>
@@ -11384,7 +11710,7 @@
                     <a:bodyPr/>
                     <a:lstStyle/>
                     <a:p>
-                      <a:pPr indent="0" marL="0">
+                      <a:pPr marL="0" indent="0">
                         <a:buNone/>
                       </a:pPr>
                       <a:r>
@@ -11405,7 +11731,7 @@
                       </a:endParaRPr>
                     </a:p>
                   </a:txBody>
-                  <a:tcPr marL="91440" marR="91440" marT="45720" marB="45720">
+                  <a:tcPr>
                     <a:lnL w="6350" cap="flat" cmpd="sng" algn="ctr">
                       <a:solidFill>
                         <a:srgbClr val="E2E8F0"/>
@@ -11452,7 +11778,7 @@
                     <a:bodyPr/>
                     <a:lstStyle/>
                     <a:p>
-                      <a:pPr algn="ctr" indent="0" marL="0">
+                      <a:pPr marL="0" indent="0" algn="ctr">
                         <a:buNone/>
                       </a:pPr>
                       <a:r>
@@ -11473,7 +11799,7 @@
                       </a:endParaRPr>
                     </a:p>
                   </a:txBody>
-                  <a:tcPr marL="91440" marR="91440" marT="45720" marB="45720">
+                  <a:tcPr>
                     <a:lnL w="6350" cap="flat" cmpd="sng" algn="ctr">
                       <a:solidFill>
                         <a:srgbClr val="E2E8F0"/>
@@ -11520,7 +11846,7 @@
                     <a:bodyPr/>
                     <a:lstStyle/>
                     <a:p>
-                      <a:pPr algn="ctr" indent="0" marL="0">
+                      <a:pPr marL="0" indent="0" algn="ctr">
                         <a:buNone/>
                       </a:pPr>
                       <a:r>
@@ -11541,7 +11867,7 @@
                       </a:endParaRPr>
                     </a:p>
                   </a:txBody>
-                  <a:tcPr marL="91440" marR="91440" marT="45720" marB="45720">
+                  <a:tcPr>
                     <a:lnL w="6350" cap="flat" cmpd="sng" algn="ctr">
                       <a:solidFill>
                         <a:srgbClr val="E2E8F0"/>
@@ -11583,6 +11909,11 @@
                     </a:solidFill>
                   </a:tcPr>
                 </a:tc>
+                <a:extLst>
+                  <a:ext uri="{0D108BD9-81ED-4DB2-BD59-A6C34878D82A}">
+                    <a16:rowId xmlns:a16="http://schemas.microsoft.com/office/drawing/2014/main" val="10008"/>
+                  </a:ext>
+                </a:extLst>
               </a:tr>
               <a:tr h="365760">
                 <a:tc>
@@ -11590,7 +11921,7 @@
                     <a:bodyPr/>
                     <a:lstStyle/>
                     <a:p>
-                      <a:pPr indent="0" marL="0">
+                      <a:pPr marL="0" indent="0">
                         <a:buNone/>
                       </a:pPr>
                       <a:r>
@@ -11611,7 +11942,7 @@
                       </a:endParaRPr>
                     </a:p>
                   </a:txBody>
-                  <a:tcPr marL="91440" marR="91440" marT="45720" marB="45720">
+                  <a:tcPr>
                     <a:lnL w="6350" cap="flat" cmpd="sng" algn="ctr">
                       <a:solidFill>
                         <a:srgbClr val="E2E8F0"/>
@@ -11658,7 +11989,7 @@
                     <a:bodyPr/>
                     <a:lstStyle/>
                     <a:p>
-                      <a:pPr algn="ctr" indent="0" marL="0">
+                      <a:pPr marL="0" indent="0" algn="ctr">
                         <a:buNone/>
                       </a:pPr>
                       <a:r>
@@ -11679,7 +12010,7 @@
                       </a:endParaRPr>
                     </a:p>
                   </a:txBody>
-                  <a:tcPr marL="91440" marR="91440" marT="45720" marB="45720">
+                  <a:tcPr>
                     <a:lnL w="6350" cap="flat" cmpd="sng" algn="ctr">
                       <a:solidFill>
                         <a:srgbClr val="E2E8F0"/>
@@ -11726,7 +12057,7 @@
                     <a:bodyPr/>
                     <a:lstStyle/>
                     <a:p>
-                      <a:pPr algn="ctr" indent="0" marL="0">
+                      <a:pPr marL="0" indent="0" algn="ctr">
                         <a:buNone/>
                       </a:pPr>
                       <a:r>
@@ -11747,7 +12078,7 @@
                       </a:endParaRPr>
                     </a:p>
                   </a:txBody>
-                  <a:tcPr marL="91440" marR="91440" marT="45720" marB="45720">
+                  <a:tcPr>
                     <a:lnL w="6350" cap="flat" cmpd="sng" algn="ctr">
                       <a:solidFill>
                         <a:srgbClr val="E2E8F0"/>
@@ -11789,6 +12120,11 @@
                     </a:solidFill>
                   </a:tcPr>
                 </a:tc>
+                <a:extLst>
+                  <a:ext uri="{0D108BD9-81ED-4DB2-BD59-A6C34878D82A}">
+                    <a16:rowId xmlns:a16="http://schemas.microsoft.com/office/drawing/2014/main" val="10009"/>
+                  </a:ext>
+                </a:extLst>
               </a:tr>
             </a:tbl>
           </a:graphicData>
@@ -11815,7 +12151,7 @@
           <a:bodyPr wrap="square" rtlCol="0" anchor="ctr"/>
           <a:lstStyle/>
           <a:p>
-            <a:pPr indent="0" marL="0">
+            <a:pPr marL="0" indent="0">
               <a:buNone/>
             </a:pPr>
             <a:r>
@@ -11851,6 +12187,13 @@
           </a:solidFill>
           <a:ln/>
         </p:spPr>
+        <p:txBody>
+          <a:bodyPr/>
+          <a:lstStyle/>
+          <a:p>
+            <a:endParaRPr lang="es-MX"/>
+          </a:p>
+        </p:txBody>
       </p:sp>
       <p:sp>
         <p:nvSpPr>
@@ -11873,7 +12216,7 @@
           <a:bodyPr wrap="square" rtlCol="0" anchor="ctr"/>
           <a:lstStyle/>
           <a:p>
-            <a:pPr indent="0" marL="0">
+            <a:pPr marL="0" indent="0">
               <a:buNone/>
             </a:pPr>
             <a:r>
@@ -11909,7 +12252,7 @@
           <a:bodyPr wrap="square" rtlCol="0" anchor="ctr"/>
           <a:lstStyle/>
           <a:p>
-            <a:pPr indent="0" marL="0">
+            <a:pPr marL="0" indent="0">
               <a:buNone/>
             </a:pPr>
             <a:r>
@@ -11945,10 +12288,17 @@
           </a:solidFill>
           <a:ln/>
         </p:spPr>
-      </p:sp>
-      <p:sp>
-        <p:nvSpPr>
-          <p:cNvPr id="10" name="Text 7"/>
+        <p:txBody>
+          <a:bodyPr/>
+          <a:lstStyle/>
+          <a:p>
+            <a:endParaRPr lang="es-MX"/>
+          </a:p>
+        </p:txBody>
+      </p:sp>
+      <p:sp>
+        <p:nvSpPr>
+          <p:cNvPr id="4" name="Text 7"/>
           <p:cNvSpPr/>
           <p:nvPr/>
         </p:nvSpPr>
@@ -11967,7 +12317,7 @@
           <a:bodyPr wrap="square" rtlCol="0" anchor="ctr"/>
           <a:lstStyle/>
           <a:p>
-            <a:pPr indent="0" marL="0">
+            <a:pPr marL="0" indent="0">
               <a:buNone/>
             </a:pPr>
             <a:r>
@@ -12003,7 +12353,7 @@
           <a:bodyPr wrap="square" rtlCol="0" anchor="ctr"/>
           <a:lstStyle/>
           <a:p>
-            <a:pPr indent="0" marL="0">
+            <a:pPr marL="0" indent="0">
               <a:buNone/>
             </a:pPr>
             <a:r>
@@ -12037,6 +12387,13 @@
           </a:solidFill>
           <a:ln/>
         </p:spPr>
+        <p:txBody>
+          <a:bodyPr/>
+          <a:lstStyle/>
+          <a:p>
+            <a:endParaRPr lang="es-MX"/>
+          </a:p>
+        </p:txBody>
       </p:sp>
       <p:sp>
         <p:nvSpPr>
@@ -12059,7 +12416,7 @@
           <a:bodyPr wrap="square" rtlCol="0" anchor="ctr"/>
           <a:lstStyle/>
           <a:p>
-            <a:pPr indent="0" marL="0">
+            <a:pPr marL="0" indent="0">
               <a:buNone/>
             </a:pPr>
             <a:r>
@@ -12095,7 +12452,7 @@
           <a:bodyPr wrap="square" rtlCol="0" anchor="ctr"/>
           <a:lstStyle/>
           <a:p>
-            <a:pPr indent="0" marL="0">
+            <a:pPr marL="0" indent="0">
               <a:buNone/>
             </a:pPr>
             <a:r>
@@ -12131,7 +12488,7 @@
           <a:bodyPr wrap="square" rtlCol="0" anchor="ctr"/>
           <a:lstStyle/>
           <a:p>
-            <a:pPr indent="0" marL="0">
+            <a:pPr marL="0" indent="0">
               <a:buNone/>
             </a:pPr>
             <a:r>
@@ -12447,4 +12804,325 @@
     </a:ext>
   </a:extLst>
 </a:theme>
+</file>
+
+<file path=ppt/theme/theme2.xml><?xml version="1.0" encoding="utf-8"?>
+<a:theme xmlns:a="http://schemas.openxmlformats.org/drawingml/2006/main" name="Tema de Office">
+  <a:themeElements>
+    <a:clrScheme name="Office">
+      <a:dk1>
+        <a:sysClr val="windowText" lastClr="000000"/>
+      </a:dk1>
+      <a:lt1>
+        <a:sysClr val="window" lastClr="FFFFFF"/>
+      </a:lt1>
+      <a:dk2>
+        <a:srgbClr val="0E2841"/>
+      </a:dk2>
+      <a:lt2>
+        <a:srgbClr val="E8E8E8"/>
+      </a:lt2>
+      <a:accent1>
+        <a:srgbClr val="156082"/>
+      </a:accent1>
+      <a:accent2>
+        <a:srgbClr val="E97132"/>
+      </a:accent2>
+      <a:accent3>
+        <a:srgbClr val="196B24"/>
+      </a:accent3>
+      <a:accent4>
+        <a:srgbClr val="0F9ED5"/>
+      </a:accent4>
+      <a:accent5>
+        <a:srgbClr val="A02B93"/>
+      </a:accent5>
+      <a:accent6>
+        <a:srgbClr val="4EA72E"/>
+      </a:accent6>
+      <a:hlink>
+        <a:srgbClr val="467886"/>
+      </a:hlink>
+      <a:folHlink>
+        <a:srgbClr val="96607D"/>
+      </a:folHlink>
+    </a:clrScheme>
+    <a:fontScheme name="Office">
+      <a:majorFont>
+        <a:latin typeface="Aptos Display" panose="02110004020202020204"/>
+        <a:ea typeface=""/>
+        <a:cs typeface=""/>
+        <a:font script="Jpan" typeface="游ゴシック Light"/>
+        <a:font script="Hang" typeface="맑은 고딕"/>
+        <a:font script="Hans" typeface="等线 Light"/>
+        <a:font script="Hant" typeface="新細明體"/>
+        <a:font script="Arab" typeface="Times New Roman"/>
+        <a:font script="Hebr" typeface="Times New Roman"/>
+        <a:font script="Thai" typeface="Angsana New"/>
+        <a:font script="Ethi" typeface="Nyala"/>
+        <a:font script="Beng" typeface="Vrinda"/>
+        <a:font script="Gujr" typeface="Shruti"/>
+        <a:font script="Khmr" typeface="MoolBoran"/>
+        <a:font script="Knda" typeface="Tunga"/>
+        <a:font script="Guru" typeface="Raavi"/>
+        <a:font script="Cans" typeface="Euphemia"/>
+        <a:font script="Cher" typeface="Plantagenet Cherokee"/>
+        <a:font script="Yiii" typeface="Microsoft Yi Baiti"/>
+        <a:font script="Tibt" typeface="Microsoft Himalaya"/>
+        <a:font script="Thaa" typeface="MV Boli"/>
+        <a:font script="Deva" typeface="Mangal"/>
+        <a:font script="Telu" typeface="Gautami"/>
+        <a:font script="Taml" typeface="Latha"/>
+        <a:font script="Syrc" typeface="Estrangelo Edessa"/>
+        <a:font script="Orya" typeface="Kalinga"/>
+        <a:font script="Mlym" typeface="Kartika"/>
+        <a:font script="Laoo" typeface="DokChampa"/>
+        <a:font script="Sinh" typeface="Iskoola Pota"/>
+        <a:font script="Mong" typeface="Mongolian Baiti"/>
+        <a:font script="Viet" typeface="Times New Roman"/>
+        <a:font script="Uigh" typeface="Microsoft Uighur"/>
+        <a:font script="Geor" typeface="Sylfaen"/>
+        <a:font script="Armn" typeface="Arial"/>
+        <a:font script="Bugi" typeface="Leelawadee UI"/>
+        <a:font script="Bopo" typeface="Microsoft JhengHei"/>
+        <a:font script="Java" typeface="Javanese Text"/>
+        <a:font script="Lisu" typeface="Segoe UI"/>
+        <a:font script="Mymr" typeface="Myanmar Text"/>
+        <a:font script="Nkoo" typeface="Ebrima"/>
+        <a:font script="Olck" typeface="Nirmala UI"/>
+        <a:font script="Osma" typeface="Ebrima"/>
+        <a:font script="Phag" typeface="Phagspa"/>
+        <a:font script="Syrn" typeface="Estrangelo Edessa"/>
+        <a:font script="Syrj" typeface="Estrangelo Edessa"/>
+        <a:font script="Syre" typeface="Estrangelo Edessa"/>
+        <a:font script="Sora" typeface="Nirmala UI"/>
+        <a:font script="Tale" typeface="Microsoft Tai Le"/>
+        <a:font script="Talu" typeface="Microsoft New Tai Lue"/>
+        <a:font script="Tfng" typeface="Ebrima"/>
+      </a:majorFont>
+      <a:minorFont>
+        <a:latin typeface="Aptos" panose="02110004020202020204"/>
+        <a:ea typeface=""/>
+        <a:cs typeface=""/>
+        <a:font script="Jpan" typeface="游ゴシック"/>
+        <a:font script="Hang" typeface="맑은 고딕"/>
+        <a:font script="Hans" typeface="等线"/>
+        <a:font script="Hant" typeface="新細明體"/>
+        <a:font script="Arab" typeface="Arial"/>
+        <a:font script="Hebr" typeface="Arial"/>
+        <a:font script="Thai" typeface="Cordia New"/>
+        <a:font script="Ethi" typeface="Nyala"/>
+        <a:font script="Beng" typeface="Vrinda"/>
+        <a:font script="Gujr" typeface="Shruti"/>
+        <a:font script="Khmr" typeface="DaunPenh"/>
+        <a:font script="Knda" typeface="Tunga"/>
+        <a:font script="Guru" typeface="Raavi"/>
+        <a:font script="Cans" typeface="Euphemia"/>
+        <a:font script="Cher" typeface="Plantagenet Cherokee"/>
+        <a:font script="Yiii" typeface="Microsoft Yi Baiti"/>
+        <a:font script="Tibt" typeface="Microsoft Himalaya"/>
+        <a:font script="Thaa" typeface="MV Boli"/>
+        <a:font script="Deva" typeface="Mangal"/>
+        <a:font script="Telu" typeface="Gautami"/>
+        <a:font script="Taml" typeface="Latha"/>
+        <a:font script="Syrc" typeface="Estrangelo Edessa"/>
+        <a:font script="Orya" typeface="Kalinga"/>
+        <a:font script="Mlym" typeface="Kartika"/>
+        <a:font script="Laoo" typeface="DokChampa"/>
+        <a:font script="Sinh" typeface="Iskoola Pota"/>
+        <a:font script="Mong" typeface="Mongolian Baiti"/>
+        <a:font script="Viet" typeface="Arial"/>
+        <a:font script="Uigh" typeface="Microsoft Uighur"/>
+        <a:font script="Geor" typeface="Sylfaen"/>
+        <a:font script="Armn" typeface="Arial"/>
+        <a:font script="Bugi" typeface="Leelawadee UI"/>
+        <a:font script="Bopo" typeface="Microsoft JhengHei"/>
+        <a:font script="Java" typeface="Javanese Text"/>
+        <a:font script="Lisu" typeface="Segoe UI"/>
+        <a:font script="Mymr" typeface="Myanmar Text"/>
+        <a:font script="Nkoo" typeface="Ebrima"/>
+        <a:font script="Olck" typeface="Nirmala UI"/>
+        <a:font script="Osma" typeface="Ebrima"/>
+        <a:font script="Phag" typeface="Phagspa"/>
+        <a:font script="Syrn" typeface="Estrangelo Edessa"/>
+        <a:font script="Syrj" typeface="Estrangelo Edessa"/>
+        <a:font script="Syre" typeface="Estrangelo Edessa"/>
+        <a:font script="Sora" typeface="Nirmala UI"/>
+        <a:font script="Tale" typeface="Microsoft Tai Le"/>
+        <a:font script="Talu" typeface="Microsoft New Tai Lue"/>
+        <a:font script="Tfng" typeface="Ebrima"/>
+      </a:minorFont>
+    </a:fontScheme>
+    <a:fmtScheme name="Office">
+      <a:fillStyleLst>
+        <a:solidFill>
+          <a:schemeClr val="phClr"/>
+        </a:solidFill>
+        <a:gradFill rotWithShape="1">
+          <a:gsLst>
+            <a:gs pos="0">
+              <a:schemeClr val="phClr">
+                <a:lumMod val="110000"/>
+                <a:satMod val="105000"/>
+                <a:tint val="67000"/>
+              </a:schemeClr>
+            </a:gs>
+            <a:gs pos="50000">
+              <a:schemeClr val="phClr">
+                <a:lumMod val="105000"/>
+                <a:satMod val="103000"/>
+                <a:tint val="73000"/>
+              </a:schemeClr>
+            </a:gs>
+            <a:gs pos="100000">
+              <a:schemeClr val="phClr">
+                <a:lumMod val="105000"/>
+                <a:satMod val="109000"/>
+                <a:tint val="81000"/>
+              </a:schemeClr>
+            </a:gs>
+          </a:gsLst>
+          <a:lin ang="5400000" scaled="0"/>
+        </a:gradFill>
+        <a:gradFill rotWithShape="1">
+          <a:gsLst>
+            <a:gs pos="0">
+              <a:schemeClr val="phClr">
+                <a:satMod val="103000"/>
+                <a:lumMod val="102000"/>
+                <a:tint val="94000"/>
+              </a:schemeClr>
+            </a:gs>
+            <a:gs pos="50000">
+              <a:schemeClr val="phClr">
+                <a:satMod val="110000"/>
+                <a:lumMod val="100000"/>
+                <a:shade val="100000"/>
+              </a:schemeClr>
+            </a:gs>
+            <a:gs pos="100000">
+              <a:schemeClr val="phClr">
+                <a:lumMod val="99000"/>
+                <a:satMod val="120000"/>
+                <a:shade val="78000"/>
+              </a:schemeClr>
+            </a:gs>
+          </a:gsLst>
+          <a:lin ang="5400000" scaled="0"/>
+        </a:gradFill>
+      </a:fillStyleLst>
+      <a:lnStyleLst>
+        <a:ln w="12700" cap="flat" cmpd="sng" algn="ctr">
+          <a:solidFill>
+            <a:schemeClr val="phClr"/>
+          </a:solidFill>
+          <a:prstDash val="solid"/>
+          <a:miter lim="800000"/>
+        </a:ln>
+        <a:ln w="19050" cap="flat" cmpd="sng" algn="ctr">
+          <a:solidFill>
+            <a:schemeClr val="phClr"/>
+          </a:solidFill>
+          <a:prstDash val="solid"/>
+          <a:miter lim="800000"/>
+        </a:ln>
+        <a:ln w="25400" cap="flat" cmpd="sng" algn="ctr">
+          <a:solidFill>
+            <a:schemeClr val="phClr"/>
+          </a:solidFill>
+          <a:prstDash val="solid"/>
+          <a:miter lim="800000"/>
+        </a:ln>
+      </a:lnStyleLst>
+      <a:effectStyleLst>
+        <a:effectStyle>
+          <a:effectLst/>
+        </a:effectStyle>
+        <a:effectStyle>
+          <a:effectLst/>
+        </a:effectStyle>
+        <a:effectStyle>
+          <a:effectLst>
+            <a:outerShdw blurRad="57150" dist="19050" dir="5400000" algn="ctr" rotWithShape="0">
+              <a:srgbClr val="000000">
+                <a:alpha val="63000"/>
+              </a:srgbClr>
+            </a:outerShdw>
+          </a:effectLst>
+        </a:effectStyle>
+      </a:effectStyleLst>
+      <a:bgFillStyleLst>
+        <a:solidFill>
+          <a:schemeClr val="phClr"/>
+        </a:solidFill>
+        <a:solidFill>
+          <a:schemeClr val="phClr">
+            <a:tint val="95000"/>
+            <a:satMod val="170000"/>
+          </a:schemeClr>
+        </a:solidFill>
+        <a:gradFill rotWithShape="1">
+          <a:gsLst>
+            <a:gs pos="0">
+              <a:schemeClr val="phClr">
+                <a:tint val="93000"/>
+                <a:satMod val="150000"/>
+                <a:shade val="98000"/>
+                <a:lumMod val="102000"/>
+              </a:schemeClr>
+            </a:gs>
+            <a:gs pos="50000">
+              <a:schemeClr val="phClr">
+                <a:tint val="98000"/>
+                <a:satMod val="130000"/>
+                <a:shade val="90000"/>
+                <a:lumMod val="103000"/>
+              </a:schemeClr>
+            </a:gs>
+            <a:gs pos="100000">
+              <a:schemeClr val="phClr">
+                <a:shade val="63000"/>
+                <a:satMod val="120000"/>
+              </a:schemeClr>
+            </a:gs>
+          </a:gsLst>
+          <a:lin ang="5400000" scaled="0"/>
+        </a:gradFill>
+      </a:bgFillStyleLst>
+    </a:fmtScheme>
+  </a:themeElements>
+  <a:objectDefaults>
+    <a:lnDef>
+      <a:spPr/>
+      <a:bodyPr/>
+      <a:lstStyle/>
+      <a:style>
+        <a:lnRef idx="2">
+          <a:schemeClr val="accent1"/>
+        </a:lnRef>
+        <a:fillRef idx="0">
+          <a:schemeClr val="accent1"/>
+        </a:fillRef>
+        <a:effectRef idx="1">
+          <a:schemeClr val="accent1"/>
+        </a:effectRef>
+        <a:fontRef idx="minor">
+          <a:schemeClr val="tx1"/>
+        </a:fontRef>
+      </a:style>
+    </a:lnDef>
+  </a:objectDefaults>
+  <a:extraClrSchemeLst/>
+  <a:extLst>
+    <a:ext uri="{05A4C25C-085E-4340-85A3-A5531E510DB2}">
+      <thm15:themeFamily xmlns:thm15="http://schemas.microsoft.com/office/thememl/2012/main" name="Office Theme" id="{2E142A2C-CD16-42D6-873A-C26D2A0506FA}" vid="{1BDDFF52-6CD6-40A5-AB3C-68EB2F1E4D0A}"/>
+    </a:ext>
+  </a:extLst>
+</a:theme>
+</file>
+
+<file path=docMetadata/LabelInfo.xml><?xml version="1.0" encoding="utf-8"?>
+<clbl:labelList xmlns:clbl="http://schemas.microsoft.com/office/2020/mipLabelMetadata">
+  <clbl:label id="{4d305a54-e534-44b8-89b6-47b6ad9af26a}" enabled="1" method="Privileged" siteId="{6e6b996f-b0c6-433e-81f0-3873ef06b338}" contentBits="0" removed="0"/>
+</clbl:labelList>
 </file>